--- a/documentation/Fish Hunter.pptx
+++ b/documentation/Fish Hunter.pptx
@@ -14,22 +14,22 @@
     <p:sldId id="259" r:id="rId5"/>
     <p:sldId id="260" r:id="rId6"/>
     <p:sldId id="263" r:id="rId7"/>
-    <p:sldId id="264" r:id="rId8"/>
-    <p:sldId id="266" r:id="rId9"/>
+    <p:sldId id="266" r:id="rId8"/>
+    <p:sldId id="264" r:id="rId9"/>
     <p:sldId id="265" r:id="rId10"/>
   </p:sldIdLst>
   <p:sldSz cx="9144000" cy="5143500" type="screen16x9"/>
   <p:notesSz cx="6858000" cy="9144000"/>
   <p:embeddedFontLst>
     <p:embeddedFont>
-      <p:font typeface="Lato" panose="020B0604020202020204" charset="0"/>
+      <p:font typeface="Montserrat" panose="020B0604020202020204" charset="-52"/>
       <p:regular r:id="rId12"/>
       <p:bold r:id="rId13"/>
       <p:italic r:id="rId14"/>
       <p:boldItalic r:id="rId15"/>
     </p:embeddedFont>
     <p:embeddedFont>
-      <p:font typeface="Montserrat" panose="020B0604020202020204" charset="-52"/>
+      <p:font typeface="Lato" panose="020B0604020202020204" charset="0"/>
       <p:regular r:id="rId16"/>
       <p:bold r:id="rId17"/>
       <p:italic r:id="rId18"/>
@@ -817,7 +817,7 @@
               </a:spcAft>
               <a:buNone/>
             </a:pPr>
-            <a:endParaRPr/>
+            <a:endParaRPr dirty="0"/>
           </a:p>
         </p:txBody>
       </p:sp>
@@ -921,7 +921,7 @@
               </a:spcAft>
               <a:buNone/>
             </a:pPr>
-            <a:endParaRPr/>
+            <a:endParaRPr dirty="0"/>
           </a:p>
         </p:txBody>
       </p:sp>
@@ -1025,7 +1025,7 @@
               </a:spcAft>
               <a:buNone/>
             </a:pPr>
-            <a:endParaRPr/>
+            <a:endParaRPr dirty="0"/>
           </a:p>
         </p:txBody>
       </p:sp>
@@ -1129,7 +1129,7 @@
               </a:spcAft>
               <a:buNone/>
             </a:pPr>
-            <a:endParaRPr/>
+            <a:endParaRPr dirty="0"/>
           </a:p>
         </p:txBody>
       </p:sp>
@@ -1233,7 +1233,7 @@
               </a:spcAft>
               <a:buNone/>
             </a:pPr>
-            <a:endParaRPr/>
+            <a:endParaRPr dirty="0"/>
           </a:p>
         </p:txBody>
       </p:sp>
@@ -1302,7 +1302,7 @@
               </a:spcAft>
               <a:buNone/>
             </a:pPr>
-            <a:endParaRPr/>
+            <a:endParaRPr dirty="0"/>
           </a:p>
         </p:txBody>
       </p:sp>
@@ -1360,7 +1360,7 @@
                 </a:spcAft>
                 <a:buNone/>
               </a:pPr>
-              <a:endParaRPr/>
+              <a:endParaRPr dirty="0"/>
             </a:p>
           </p:txBody>
         </p:sp>
@@ -1404,7 +1404,7 @@
                 </a:spcAft>
                 <a:buNone/>
               </a:pPr>
-              <a:endParaRPr/>
+              <a:endParaRPr dirty="0"/>
             </a:p>
           </p:txBody>
         </p:sp>
@@ -1446,7 +1446,7 @@
                 </a:spcAft>
                 <a:buNone/>
               </a:pPr>
-              <a:endParaRPr/>
+              <a:endParaRPr dirty="0"/>
             </a:p>
           </p:txBody>
         </p:sp>
@@ -1488,7 +1488,7 @@
                 </a:spcAft>
                 <a:buNone/>
               </a:pPr>
-              <a:endParaRPr/>
+              <a:endParaRPr dirty="0"/>
             </a:p>
           </p:txBody>
         </p:sp>
@@ -1853,7 +1853,7 @@
               <a:rPr lang="ru"/>
               <a:t>‹#›</a:t>
             </a:fld>
-            <a:endParaRPr/>
+            <a:endParaRPr dirty="0"/>
           </a:p>
         </p:txBody>
       </p:sp>
@@ -1936,7 +1936,7 @@
                 </a:spcAft>
                 <a:buNone/>
               </a:pPr>
-              <a:endParaRPr/>
+              <a:endParaRPr dirty="0"/>
             </a:p>
           </p:txBody>
         </p:sp>
@@ -1980,7 +1980,7 @@
                 </a:spcAft>
                 <a:buNone/>
               </a:pPr>
-              <a:endParaRPr/>
+              <a:endParaRPr dirty="0"/>
             </a:p>
           </p:txBody>
         </p:sp>
@@ -2024,7 +2024,7 @@
                 </a:spcAft>
                 <a:buNone/>
               </a:pPr>
-              <a:endParaRPr/>
+              <a:endParaRPr dirty="0"/>
             </a:p>
           </p:txBody>
         </p:sp>
@@ -2068,7 +2068,7 @@
                 </a:spcAft>
                 <a:buNone/>
               </a:pPr>
-              <a:endParaRPr/>
+              <a:endParaRPr dirty="0"/>
             </a:p>
           </p:txBody>
         </p:sp>
@@ -2112,7 +2112,7 @@
                 </a:spcAft>
                 <a:buNone/>
               </a:pPr>
-              <a:endParaRPr/>
+              <a:endParaRPr dirty="0"/>
             </a:p>
           </p:txBody>
         </p:sp>
@@ -2156,7 +2156,7 @@
                 </a:spcAft>
                 <a:buNone/>
               </a:pPr>
-              <a:endParaRPr/>
+              <a:endParaRPr dirty="0"/>
             </a:p>
           </p:txBody>
         </p:sp>
@@ -2200,7 +2200,7 @@
                 </a:spcAft>
                 <a:buNone/>
               </a:pPr>
-              <a:endParaRPr/>
+              <a:endParaRPr dirty="0"/>
             </a:p>
           </p:txBody>
         </p:sp>
@@ -2242,7 +2242,7 @@
                 </a:spcAft>
                 <a:buNone/>
               </a:pPr>
-              <a:endParaRPr/>
+              <a:endParaRPr dirty="0"/>
             </a:p>
           </p:txBody>
         </p:sp>
@@ -2286,7 +2286,7 @@
                 </a:spcAft>
                 <a:buNone/>
               </a:pPr>
-              <a:endParaRPr/>
+              <a:endParaRPr dirty="0"/>
             </a:p>
           </p:txBody>
         </p:sp>
@@ -2330,7 +2330,7 @@
                 </a:spcAft>
                 <a:buNone/>
               </a:pPr>
-              <a:endParaRPr/>
+              <a:endParaRPr dirty="0"/>
             </a:p>
           </p:txBody>
         </p:sp>
@@ -2374,7 +2374,7 @@
                 </a:spcAft>
                 <a:buNone/>
               </a:pPr>
-              <a:endParaRPr/>
+              <a:endParaRPr dirty="0"/>
             </a:p>
           </p:txBody>
         </p:sp>
@@ -2418,7 +2418,7 @@
                 </a:spcAft>
                 <a:buNone/>
               </a:pPr>
-              <a:endParaRPr/>
+              <a:endParaRPr dirty="0"/>
             </a:p>
           </p:txBody>
         </p:sp>
@@ -2462,7 +2462,7 @@
                 </a:spcAft>
                 <a:buNone/>
               </a:pPr>
-              <a:endParaRPr/>
+              <a:endParaRPr dirty="0"/>
             </a:p>
           </p:txBody>
         </p:sp>
@@ -2504,7 +2504,7 @@
                 </a:spcAft>
                 <a:buNone/>
               </a:pPr>
-              <a:endParaRPr/>
+              <a:endParaRPr dirty="0"/>
             </a:p>
           </p:txBody>
         </p:sp>
@@ -2548,7 +2548,7 @@
                 </a:spcAft>
                 <a:buNone/>
               </a:pPr>
-              <a:endParaRPr/>
+              <a:endParaRPr dirty="0"/>
             </a:p>
           </p:txBody>
         </p:sp>
@@ -2592,7 +2592,7 @@
                 </a:spcAft>
                 <a:buNone/>
               </a:pPr>
-              <a:endParaRPr/>
+              <a:endParaRPr dirty="0"/>
             </a:p>
           </p:txBody>
         </p:sp>
@@ -2636,7 +2636,7 @@
                 </a:spcAft>
                 <a:buNone/>
               </a:pPr>
-              <a:endParaRPr/>
+              <a:endParaRPr dirty="0"/>
             </a:p>
           </p:txBody>
         </p:sp>
@@ -2680,7 +2680,7 @@
                 </a:spcAft>
                 <a:buNone/>
               </a:pPr>
-              <a:endParaRPr/>
+              <a:endParaRPr dirty="0"/>
             </a:p>
           </p:txBody>
         </p:sp>
@@ -3020,7 +3020,7 @@
               <a:rPr lang="ru"/>
               <a:t>‹#›</a:t>
             </a:fld>
-            <a:endParaRPr/>
+            <a:endParaRPr dirty="0"/>
           </a:p>
         </p:txBody>
       </p:sp>
@@ -3124,7 +3124,7 @@
               <a:rPr lang="ru"/>
               <a:t>‹#›</a:t>
             </a:fld>
-            <a:endParaRPr/>
+            <a:endParaRPr dirty="0"/>
           </a:p>
         </p:txBody>
       </p:sp>
@@ -3207,7 +3207,7 @@
                 </a:spcAft>
                 <a:buNone/>
               </a:pPr>
-              <a:endParaRPr/>
+              <a:endParaRPr dirty="0"/>
             </a:p>
           </p:txBody>
         </p:sp>
@@ -3251,7 +3251,7 @@
                 </a:spcAft>
                 <a:buNone/>
               </a:pPr>
-              <a:endParaRPr/>
+              <a:endParaRPr dirty="0"/>
             </a:p>
           </p:txBody>
         </p:sp>
@@ -3295,7 +3295,7 @@
                 </a:spcAft>
                 <a:buNone/>
               </a:pPr>
-              <a:endParaRPr/>
+              <a:endParaRPr dirty="0"/>
             </a:p>
           </p:txBody>
         </p:sp>
@@ -3339,7 +3339,7 @@
                 </a:spcAft>
                 <a:buNone/>
               </a:pPr>
-              <a:endParaRPr/>
+              <a:endParaRPr dirty="0"/>
             </a:p>
           </p:txBody>
         </p:sp>
@@ -3383,7 +3383,7 @@
                 </a:spcAft>
                 <a:buNone/>
               </a:pPr>
-              <a:endParaRPr/>
+              <a:endParaRPr dirty="0"/>
             </a:p>
           </p:txBody>
         </p:sp>
@@ -3427,7 +3427,7 @@
                 </a:spcAft>
                 <a:buNone/>
               </a:pPr>
-              <a:endParaRPr/>
+              <a:endParaRPr dirty="0"/>
             </a:p>
           </p:txBody>
         </p:sp>
@@ -3471,7 +3471,7 @@
                 </a:spcAft>
                 <a:buNone/>
               </a:pPr>
-              <a:endParaRPr/>
+              <a:endParaRPr dirty="0"/>
             </a:p>
           </p:txBody>
         </p:sp>
@@ -3513,7 +3513,7 @@
                 </a:spcAft>
                 <a:buNone/>
               </a:pPr>
-              <a:endParaRPr/>
+              <a:endParaRPr dirty="0"/>
             </a:p>
           </p:txBody>
         </p:sp>
@@ -3557,7 +3557,7 @@
                 </a:spcAft>
                 <a:buNone/>
               </a:pPr>
-              <a:endParaRPr/>
+              <a:endParaRPr dirty="0"/>
             </a:p>
           </p:txBody>
         </p:sp>
@@ -3601,7 +3601,7 @@
                 </a:spcAft>
                 <a:buNone/>
               </a:pPr>
-              <a:endParaRPr/>
+              <a:endParaRPr dirty="0"/>
             </a:p>
           </p:txBody>
         </p:sp>
@@ -3645,7 +3645,7 @@
                 </a:spcAft>
                 <a:buNone/>
               </a:pPr>
-              <a:endParaRPr/>
+              <a:endParaRPr dirty="0"/>
             </a:p>
           </p:txBody>
         </p:sp>
@@ -3689,7 +3689,7 @@
                 </a:spcAft>
                 <a:buNone/>
               </a:pPr>
-              <a:endParaRPr/>
+              <a:endParaRPr dirty="0"/>
             </a:p>
           </p:txBody>
         </p:sp>
@@ -3733,7 +3733,7 @@
                 </a:spcAft>
                 <a:buNone/>
               </a:pPr>
-              <a:endParaRPr/>
+              <a:endParaRPr dirty="0"/>
             </a:p>
           </p:txBody>
         </p:sp>
@@ -3775,7 +3775,7 @@
                 </a:spcAft>
                 <a:buNone/>
               </a:pPr>
-              <a:endParaRPr/>
+              <a:endParaRPr dirty="0"/>
             </a:p>
           </p:txBody>
         </p:sp>
@@ -3819,7 +3819,7 @@
                 </a:spcAft>
                 <a:buNone/>
               </a:pPr>
-              <a:endParaRPr/>
+              <a:endParaRPr dirty="0"/>
             </a:p>
           </p:txBody>
         </p:sp>
@@ -3863,7 +3863,7 @@
                 </a:spcAft>
                 <a:buNone/>
               </a:pPr>
-              <a:endParaRPr/>
+              <a:endParaRPr dirty="0"/>
             </a:p>
           </p:txBody>
         </p:sp>
@@ -3907,7 +3907,7 @@
                 </a:spcAft>
                 <a:buNone/>
               </a:pPr>
-              <a:endParaRPr/>
+              <a:endParaRPr dirty="0"/>
             </a:p>
           </p:txBody>
         </p:sp>
@@ -3951,7 +3951,7 @@
                 </a:spcAft>
                 <a:buNone/>
               </a:pPr>
-              <a:endParaRPr/>
+              <a:endParaRPr dirty="0"/>
             </a:p>
           </p:txBody>
         </p:sp>
@@ -4160,7 +4160,7 @@
               <a:rPr lang="ru"/>
               <a:t>‹#›</a:t>
             </a:fld>
-            <a:endParaRPr/>
+            <a:endParaRPr dirty="0"/>
           </a:p>
         </p:txBody>
       </p:sp>
@@ -4241,7 +4241,7 @@
                 </a:spcAft>
                 <a:buNone/>
               </a:pPr>
-              <a:endParaRPr/>
+              <a:endParaRPr dirty="0"/>
             </a:p>
           </p:txBody>
         </p:sp>
@@ -4283,7 +4283,7 @@
                 </a:spcAft>
                 <a:buNone/>
               </a:pPr>
-              <a:endParaRPr/>
+              <a:endParaRPr dirty="0"/>
             </a:p>
           </p:txBody>
         </p:sp>
@@ -4621,7 +4621,7 @@
               <a:rPr lang="ru"/>
               <a:t>‹#›</a:t>
             </a:fld>
-            <a:endParaRPr/>
+            <a:endParaRPr dirty="0"/>
           </a:p>
         </p:txBody>
       </p:sp>
@@ -4702,7 +4702,7 @@
                 </a:spcAft>
                 <a:buNone/>
               </a:pPr>
-              <a:endParaRPr/>
+              <a:endParaRPr dirty="0"/>
             </a:p>
           </p:txBody>
         </p:sp>
@@ -4744,7 +4744,7 @@
                 </a:spcAft>
                 <a:buNone/>
               </a:pPr>
-              <a:endParaRPr/>
+              <a:endParaRPr dirty="0"/>
             </a:p>
           </p:txBody>
         </p:sp>
@@ -5211,7 +5211,7 @@
               <a:rPr lang="ru"/>
               <a:t>‹#›</a:t>
             </a:fld>
-            <a:endParaRPr/>
+            <a:endParaRPr dirty="0"/>
           </a:p>
         </p:txBody>
       </p:sp>
@@ -5292,7 +5292,7 @@
                 </a:spcAft>
                 <a:buNone/>
               </a:pPr>
-              <a:endParaRPr/>
+              <a:endParaRPr dirty="0"/>
             </a:p>
           </p:txBody>
         </p:sp>
@@ -5334,7 +5334,7 @@
                 </a:spcAft>
                 <a:buNone/>
               </a:pPr>
-              <a:endParaRPr/>
+              <a:endParaRPr dirty="0"/>
             </a:p>
           </p:txBody>
         </p:sp>
@@ -5543,7 +5543,7 @@
               <a:rPr lang="ru"/>
               <a:t>‹#›</a:t>
             </a:fld>
-            <a:endParaRPr/>
+            <a:endParaRPr dirty="0"/>
           </a:p>
         </p:txBody>
       </p:sp>
@@ -5624,7 +5624,7 @@
                 </a:spcAft>
                 <a:buNone/>
               </a:pPr>
-              <a:endParaRPr/>
+              <a:endParaRPr dirty="0"/>
             </a:p>
           </p:txBody>
         </p:sp>
@@ -5666,7 +5666,7 @@
                 </a:spcAft>
                 <a:buNone/>
               </a:pPr>
-              <a:endParaRPr/>
+              <a:endParaRPr dirty="0"/>
             </a:p>
           </p:txBody>
         </p:sp>
@@ -6004,7 +6004,7 @@
               <a:rPr lang="ru"/>
               <a:t>‹#›</a:t>
             </a:fld>
-            <a:endParaRPr/>
+            <a:endParaRPr dirty="0"/>
           </a:p>
         </p:txBody>
       </p:sp>
@@ -6087,7 +6087,7 @@
                 </a:spcAft>
                 <a:buNone/>
               </a:pPr>
-              <a:endParaRPr/>
+              <a:endParaRPr dirty="0"/>
             </a:p>
           </p:txBody>
         </p:sp>
@@ -6131,7 +6131,7 @@
                 </a:spcAft>
                 <a:buNone/>
               </a:pPr>
-              <a:endParaRPr/>
+              <a:endParaRPr dirty="0"/>
             </a:p>
           </p:txBody>
         </p:sp>
@@ -6175,7 +6175,7 @@
                 </a:spcAft>
                 <a:buNone/>
               </a:pPr>
-              <a:endParaRPr/>
+              <a:endParaRPr dirty="0"/>
             </a:p>
           </p:txBody>
         </p:sp>
@@ -6219,7 +6219,7 @@
                 </a:spcAft>
                 <a:buNone/>
               </a:pPr>
-              <a:endParaRPr/>
+              <a:endParaRPr dirty="0"/>
             </a:p>
           </p:txBody>
         </p:sp>
@@ -6263,7 +6263,7 @@
                 </a:spcAft>
                 <a:buNone/>
               </a:pPr>
-              <a:endParaRPr/>
+              <a:endParaRPr dirty="0"/>
             </a:p>
           </p:txBody>
         </p:sp>
@@ -6307,7 +6307,7 @@
                 </a:spcAft>
                 <a:buNone/>
               </a:pPr>
-              <a:endParaRPr/>
+              <a:endParaRPr dirty="0"/>
             </a:p>
           </p:txBody>
         </p:sp>
@@ -6351,7 +6351,7 @@
                 </a:spcAft>
                 <a:buNone/>
               </a:pPr>
-              <a:endParaRPr/>
+              <a:endParaRPr dirty="0"/>
             </a:p>
           </p:txBody>
         </p:sp>
@@ -6393,7 +6393,7 @@
                 </a:spcAft>
                 <a:buNone/>
               </a:pPr>
-              <a:endParaRPr/>
+              <a:endParaRPr dirty="0"/>
             </a:p>
           </p:txBody>
         </p:sp>
@@ -6437,7 +6437,7 @@
                 </a:spcAft>
                 <a:buNone/>
               </a:pPr>
-              <a:endParaRPr/>
+              <a:endParaRPr dirty="0"/>
             </a:p>
           </p:txBody>
         </p:sp>
@@ -6481,7 +6481,7 @@
                 </a:spcAft>
                 <a:buNone/>
               </a:pPr>
-              <a:endParaRPr/>
+              <a:endParaRPr dirty="0"/>
             </a:p>
           </p:txBody>
         </p:sp>
@@ -6525,7 +6525,7 @@
                 </a:spcAft>
                 <a:buNone/>
               </a:pPr>
-              <a:endParaRPr/>
+              <a:endParaRPr dirty="0"/>
             </a:p>
           </p:txBody>
         </p:sp>
@@ -6569,7 +6569,7 @@
                 </a:spcAft>
                 <a:buNone/>
               </a:pPr>
-              <a:endParaRPr/>
+              <a:endParaRPr dirty="0"/>
             </a:p>
           </p:txBody>
         </p:sp>
@@ -6613,7 +6613,7 @@
                 </a:spcAft>
                 <a:buNone/>
               </a:pPr>
-              <a:endParaRPr/>
+              <a:endParaRPr dirty="0"/>
             </a:p>
           </p:txBody>
         </p:sp>
@@ -6655,7 +6655,7 @@
                 </a:spcAft>
                 <a:buNone/>
               </a:pPr>
-              <a:endParaRPr/>
+              <a:endParaRPr dirty="0"/>
             </a:p>
           </p:txBody>
         </p:sp>
@@ -6699,7 +6699,7 @@
                 </a:spcAft>
                 <a:buNone/>
               </a:pPr>
-              <a:endParaRPr/>
+              <a:endParaRPr dirty="0"/>
             </a:p>
           </p:txBody>
         </p:sp>
@@ -6743,7 +6743,7 @@
                 </a:spcAft>
                 <a:buNone/>
               </a:pPr>
-              <a:endParaRPr/>
+              <a:endParaRPr dirty="0"/>
             </a:p>
           </p:txBody>
         </p:sp>
@@ -6787,7 +6787,7 @@
                 </a:spcAft>
                 <a:buNone/>
               </a:pPr>
-              <a:endParaRPr/>
+              <a:endParaRPr dirty="0"/>
             </a:p>
           </p:txBody>
         </p:sp>
@@ -6831,7 +6831,7 @@
                 </a:spcAft>
                 <a:buNone/>
               </a:pPr>
-              <a:endParaRPr/>
+              <a:endParaRPr dirty="0"/>
             </a:p>
           </p:txBody>
         </p:sp>
@@ -7040,7 +7040,7 @@
               <a:rPr lang="ru"/>
               <a:t>‹#›</a:t>
             </a:fld>
-            <a:endParaRPr/>
+            <a:endParaRPr dirty="0"/>
           </a:p>
         </p:txBody>
       </p:sp>
@@ -7121,7 +7121,7 @@
                 </a:spcAft>
                 <a:buNone/>
               </a:pPr>
-              <a:endParaRPr/>
+              <a:endParaRPr dirty="0"/>
             </a:p>
           </p:txBody>
         </p:sp>
@@ -7163,7 +7163,7 @@
                 </a:spcAft>
                 <a:buNone/>
               </a:pPr>
-              <a:endParaRPr/>
+              <a:endParaRPr dirty="0"/>
             </a:p>
           </p:txBody>
         </p:sp>
@@ -7657,7 +7657,7 @@
               <a:rPr lang="ru"/>
               <a:t>‹#›</a:t>
             </a:fld>
-            <a:endParaRPr/>
+            <a:endParaRPr dirty="0"/>
           </a:p>
         </p:txBody>
       </p:sp>
@@ -7740,7 +7740,7 @@
                 </a:spcAft>
                 <a:buNone/>
               </a:pPr>
-              <a:endParaRPr/>
+              <a:endParaRPr dirty="0"/>
             </a:p>
           </p:txBody>
         </p:sp>
@@ -7784,7 +7784,7 @@
                 </a:spcAft>
                 <a:buNone/>
               </a:pPr>
-              <a:endParaRPr/>
+              <a:endParaRPr dirty="0"/>
             </a:p>
           </p:txBody>
         </p:sp>
@@ -7908,7 +7908,7 @@
               <a:rPr lang="ru"/>
               <a:t>‹#›</a:t>
             </a:fld>
-            <a:endParaRPr/>
+            <a:endParaRPr dirty="0"/>
           </a:p>
         </p:txBody>
       </p:sp>
@@ -8605,7 +8605,7 @@
               <a:rPr lang="ru"/>
               <a:t>‹#›</a:t>
             </a:fld>
-            <a:endParaRPr/>
+            <a:endParaRPr dirty="0"/>
           </a:p>
         </p:txBody>
       </p:sp>
@@ -9525,8 +9525,8 @@
         </p:nvSpPr>
         <p:spPr>
           <a:xfrm>
-            <a:off x="1338751" y="505905"/>
-            <a:ext cx="2662608" cy="629986"/>
+            <a:off x="3199445" y="279023"/>
+            <a:ext cx="2314456" cy="629986"/>
           </a:xfrm>
           <a:prstGeom prst="rect">
             <a:avLst/>
@@ -9583,8 +9583,8 @@
         </p:nvSpPr>
         <p:spPr>
           <a:xfrm>
-            <a:off x="276821" y="1394924"/>
-            <a:ext cx="3944100" cy="3170201"/>
+            <a:off x="263071" y="1266599"/>
+            <a:ext cx="4267678" cy="3415404"/>
           </a:xfrm>
           <a:prstGeom prst="rect">
             <a:avLst/>
@@ -9600,7 +9600,7 @@
           </a:bodyPr>
           <a:lstStyle/>
           <a:p>
-            <a:pPr marL="0" lvl="0" indent="0" algn="l" rtl="0">
+            <a:pPr marL="0" lvl="0" indent="0" rtl="0">
               <a:spcBef>
                 <a:spcPts val="0"/>
               </a:spcBef>
@@ -9635,7 +9635,7 @@
             </a:r>
           </a:p>
           <a:p>
-            <a:pPr marL="0" lvl="0" indent="0" algn="l" rtl="0">
+            <a:pPr marL="0" lvl="0" indent="0" rtl="0">
               <a:spcBef>
                 <a:spcPts val="0"/>
               </a:spcBef>
@@ -9681,7 +9681,7 @@
               <a:t> в жанре </a:t>
             </a:r>
             <a:r>
-              <a:rPr lang="ru-RU" dirty="0" err="1" smtClean="0">
+              <a:rPr lang="ru-RU" dirty="0" smtClean="0">
                 <a:solidFill>
                   <a:schemeClr val="lt1"/>
                 </a:solidFill>
@@ -9726,11 +9726,52 @@
                 <a:cs typeface="Times New Roman" panose="02020603050405020304" pitchFamily="18" charset="0"/>
                 <a:sym typeface="Lato"/>
               </a:rPr>
-              <a:t>Super Mario Bros.</a:t>
+              <a:t>Super Mario Bros</a:t>
             </a:r>
+            <a:r>
+              <a:rPr lang="en-US" dirty="0" smtClean="0">
+                <a:solidFill>
+                  <a:schemeClr val="lt1"/>
+                </a:solidFill>
+                <a:latin typeface="Times New Roman" panose="02020603050405020304" pitchFamily="18" charset="0"/>
+                <a:ea typeface="Lato"/>
+                <a:cs typeface="Times New Roman" panose="02020603050405020304" pitchFamily="18" charset="0"/>
+                <a:sym typeface="Lato"/>
+              </a:rPr>
+              <a:t>.</a:t>
+            </a:r>
+            <a:endParaRPr lang="ru-RU" dirty="0" smtClean="0">
+              <a:solidFill>
+                <a:schemeClr val="lt1"/>
+              </a:solidFill>
+              <a:latin typeface="Times New Roman" panose="02020603050405020304" pitchFamily="18" charset="0"/>
+              <a:ea typeface="Lato"/>
+              <a:cs typeface="Times New Roman" panose="02020603050405020304" pitchFamily="18" charset="0"/>
+              <a:sym typeface="Lato"/>
+            </a:endParaRPr>
           </a:p>
           <a:p>
-            <a:pPr marL="0" lvl="0" indent="0" algn="l" rtl="0">
+            <a:pPr marL="0" lvl="0" indent="0" rtl="0">
+              <a:spcBef>
+                <a:spcPts val="0"/>
+              </a:spcBef>
+              <a:spcAft>
+                <a:spcPts val="0"/>
+              </a:spcAft>
+              <a:buNone/>
+            </a:pPr>
+            <a:endParaRPr lang="en-US" dirty="0" smtClean="0">
+              <a:solidFill>
+                <a:schemeClr val="lt1"/>
+              </a:solidFill>
+              <a:latin typeface="Times New Roman" panose="02020603050405020304" pitchFamily="18" charset="0"/>
+              <a:ea typeface="Lato"/>
+              <a:cs typeface="Times New Roman" panose="02020603050405020304" pitchFamily="18" charset="0"/>
+              <a:sym typeface="Lato"/>
+            </a:endParaRPr>
+          </a:p>
+          <a:p>
+            <a:pPr marL="0" lvl="0" indent="0" rtl="0">
               <a:spcBef>
                 <a:spcPts val="0"/>
               </a:spcBef>
@@ -9765,7 +9806,7 @@
             </a:r>
           </a:p>
           <a:p>
-            <a:pPr marL="0" lvl="0" indent="0" algn="l" rtl="0">
+            <a:pPr marL="0" lvl="0" indent="0" rtl="0">
               <a:spcBef>
                 <a:spcPts val="0"/>
               </a:spcBef>
@@ -9800,7 +9841,7 @@
             </a:r>
           </a:p>
           <a:p>
-            <a:pPr marL="0" lvl="0" indent="0" algn="l" rtl="0">
+            <a:pPr marL="0" lvl="0" indent="0" rtl="0">
               <a:spcBef>
                 <a:spcPts val="0"/>
               </a:spcBef>
@@ -9823,7 +9864,7 @@
             </a:r>
           </a:p>
           <a:p>
-            <a:pPr marL="0" lvl="0" indent="0" algn="l" rtl="0">
+            <a:pPr marL="0" lvl="0" indent="0" rtl="0">
               <a:spcBef>
                 <a:spcPts val="0"/>
               </a:spcBef>
@@ -9867,7 +9908,7 @@
             </a:endParaRPr>
           </a:p>
           <a:p>
-            <a:pPr marL="0" lvl="0" indent="0" algn="l" rtl="0">
+            <a:pPr marL="0" lvl="0" indent="0" rtl="0">
               <a:spcBef>
                 <a:spcPts val="0"/>
               </a:spcBef>
@@ -9886,23 +9927,11 @@
                 <a:cs typeface="Times New Roman" panose="02020603050405020304" pitchFamily="18" charset="0"/>
                 <a:sym typeface="Lato"/>
               </a:rPr>
-              <a:t>4)Добавить </a:t>
-            </a:r>
-            <a:r>
-              <a:rPr lang="ru-RU" dirty="0" smtClean="0">
-                <a:solidFill>
-                  <a:schemeClr val="lt1"/>
-                </a:solidFill>
-                <a:latin typeface="Times New Roman" panose="02020603050405020304" pitchFamily="18" charset="0"/>
-                <a:ea typeface="Lato"/>
-                <a:cs typeface="Times New Roman" panose="02020603050405020304" pitchFamily="18" charset="0"/>
-                <a:sym typeface="Lato"/>
-              </a:rPr>
-              <a:t>предметы</a:t>
+              <a:t>4)Добавить предметы</a:t>
             </a:r>
           </a:p>
           <a:p>
-            <a:pPr marL="0" lvl="0" indent="0" algn="l" rtl="0">
+            <a:pPr marL="0" lvl="0" indent="0" rtl="0">
               <a:spcBef>
                 <a:spcPts val="0"/>
               </a:spcBef>
@@ -9925,7 +9954,7 @@
             </a:r>
           </a:p>
           <a:p>
-            <a:pPr marL="0" lvl="0" indent="0" algn="l" rtl="0">
+            <a:pPr marL="0" lvl="0" indent="0" rtl="0">
               <a:spcBef>
                 <a:spcPts val="0"/>
               </a:spcBef>
@@ -9944,23 +9973,11 @@
                 <a:cs typeface="Times New Roman" panose="02020603050405020304" pitchFamily="18" charset="0"/>
                 <a:sym typeface="Lato"/>
               </a:rPr>
-              <a:t>6)Сделать систему частиц для </a:t>
-            </a:r>
-            <a:r>
-              <a:rPr lang="ru-RU" dirty="0" smtClean="0">
-                <a:solidFill>
-                  <a:schemeClr val="lt1"/>
-                </a:solidFill>
-                <a:latin typeface="Times New Roman" panose="02020603050405020304" pitchFamily="18" charset="0"/>
-                <a:ea typeface="Lato"/>
-                <a:cs typeface="Times New Roman" panose="02020603050405020304" pitchFamily="18" charset="0"/>
-                <a:sym typeface="Lato"/>
-              </a:rPr>
-              <a:t>фейерверков</a:t>
+              <a:t>6)Сделать систему частиц для фейерверков</a:t>
             </a:r>
           </a:p>
           <a:p>
-            <a:pPr marL="0" lvl="0" indent="0" algn="l" rtl="0">
+            <a:pPr marL="0" lvl="0" indent="0" rtl="0">
               <a:spcBef>
                 <a:spcPts val="0"/>
               </a:spcBef>
@@ -9983,7 +10000,7 @@
             </a:r>
           </a:p>
           <a:p>
-            <a:pPr marL="0" lvl="0" indent="0" algn="l" rtl="0">
+            <a:pPr marL="0" lvl="0" indent="0" rtl="0">
               <a:spcBef>
                 <a:spcPts val="0"/>
               </a:spcBef>
@@ -10028,15 +10045,6 @@
               </a:rPr>
               <a:t>файл</a:t>
             </a:r>
-            <a:endParaRPr lang="ru-RU" dirty="0" smtClean="0">
-              <a:solidFill>
-                <a:schemeClr val="lt1"/>
-              </a:solidFill>
-              <a:latin typeface="Times New Roman" panose="02020603050405020304" pitchFamily="18" charset="0"/>
-              <a:ea typeface="Lato"/>
-              <a:cs typeface="Times New Roman" panose="02020603050405020304" pitchFamily="18" charset="0"/>
-              <a:sym typeface="Lato"/>
-            </a:endParaRPr>
           </a:p>
           <a:p>
             <a:pPr marL="0" lvl="0" indent="0" algn="l" rtl="0">
@@ -10116,7 +10124,7 @@
         </p:blipFill>
         <p:spPr>
           <a:xfrm>
-            <a:off x="4516557" y="820898"/>
+            <a:off x="4770939" y="1266599"/>
             <a:ext cx="4060477" cy="3530850"/>
           </a:xfrm>
           <a:prstGeom prst="rect">
@@ -10144,7 +10152,7 @@
         </p:blipFill>
         <p:spPr>
           <a:xfrm>
-            <a:off x="6913607" y="1266599"/>
+            <a:off x="7229866" y="1706611"/>
             <a:ext cx="581373" cy="685955"/>
           </a:xfrm>
           <a:prstGeom prst="rect">
@@ -10200,7 +10208,7 @@
         </p:nvSpPr>
         <p:spPr>
           <a:xfrm>
-            <a:off x="3215675" y="579378"/>
+            <a:off x="3195050" y="428124"/>
             <a:ext cx="2786364" cy="603153"/>
           </a:xfrm>
           <a:prstGeom prst="rect">
@@ -10252,7 +10260,7 @@
         </p:blipFill>
         <p:spPr>
           <a:xfrm>
-            <a:off x="4228448" y="1787763"/>
+            <a:off x="4317825" y="1574632"/>
             <a:ext cx="4572000" cy="2571750"/>
           </a:xfrm>
           <a:prstGeom prst="rect">
@@ -10272,8 +10280,8 @@
         </p:nvSpPr>
         <p:spPr>
           <a:xfrm>
-            <a:off x="677888" y="1787763"/>
-            <a:ext cx="2842208" cy="2618511"/>
+            <a:off x="323134" y="2265911"/>
+            <a:ext cx="3919064" cy="1189192"/>
           </a:xfrm>
           <a:prstGeom prst="rect">
             <a:avLst/>
@@ -10289,7 +10297,7 @@
           </a:bodyPr>
           <a:lstStyle/>
           <a:p>
-            <a:pPr marL="0" lvl="0" indent="0" algn="l" rtl="0">
+            <a:pPr marL="0" lvl="0" indent="0" rtl="0">
               <a:spcBef>
                 <a:spcPts val="0"/>
               </a:spcBef>
@@ -10299,7 +10307,7 @@
               <a:buNone/>
             </a:pPr>
             <a:r>
-              <a:rPr lang="ru" sz="1800" dirty="0" smtClean="0">
+              <a:rPr lang="ru" sz="2000" dirty="0" smtClean="0">
                 <a:solidFill>
                   <a:schemeClr val="lt1"/>
                 </a:solidFill>
@@ -10308,8 +10316,52 @@
                 <a:cs typeface="Times New Roman" panose="02020603050405020304" pitchFamily="18" charset="0"/>
                 <a:sym typeface="Lato"/>
               </a:rPr>
-              <a:t>Платформер - один из старейших и известнейших жанров игр, но кто сказал, что они устарели? </a:t>
+              <a:t>Платформер - один из старейших и известнейших жанров игр, но кто сказал, что они устарели</a:t>
             </a:r>
+            <a:r>
+              <a:rPr lang="ru" sz="2000" dirty="0" smtClean="0">
+                <a:solidFill>
+                  <a:schemeClr val="lt1"/>
+                </a:solidFill>
+                <a:latin typeface="Times New Roman" panose="02020603050405020304" pitchFamily="18" charset="0"/>
+                <a:ea typeface="Lato"/>
+                <a:cs typeface="Times New Roman" panose="02020603050405020304" pitchFamily="18" charset="0"/>
+                <a:sym typeface="Lato"/>
+              </a:rPr>
+              <a:t>?</a:t>
+            </a:r>
+          </a:p>
+          <a:p>
+            <a:pPr marL="0" lvl="0" indent="0" algn="just" rtl="0">
+              <a:spcBef>
+                <a:spcPts val="0"/>
+              </a:spcBef>
+              <a:spcAft>
+                <a:spcPts val="0"/>
+              </a:spcAft>
+              <a:buNone/>
+            </a:pPr>
+            <a:r>
+              <a:rPr lang="ru" sz="2000" dirty="0" smtClean="0">
+                <a:solidFill>
+                  <a:schemeClr val="lt1"/>
+                </a:solidFill>
+                <a:latin typeface="Times New Roman" panose="02020603050405020304" pitchFamily="18" charset="0"/>
+                <a:ea typeface="Lato"/>
+                <a:cs typeface="Times New Roman" panose="02020603050405020304" pitchFamily="18" charset="0"/>
+                <a:sym typeface="Lato"/>
+              </a:rPr>
+              <a:t> </a:t>
+            </a:r>
+            <a:endParaRPr lang="ru" sz="2000" dirty="0" smtClean="0">
+              <a:solidFill>
+                <a:schemeClr val="lt1"/>
+              </a:solidFill>
+              <a:latin typeface="Times New Roman" panose="02020603050405020304" pitchFamily="18" charset="0"/>
+              <a:ea typeface="Lato"/>
+              <a:cs typeface="Times New Roman" panose="02020603050405020304" pitchFamily="18" charset="0"/>
+              <a:sym typeface="Lato"/>
+            </a:endParaRPr>
           </a:p>
           <a:p>
             <a:pPr marL="0" lvl="0" indent="0" algn="l" rtl="0">
@@ -10484,7 +10536,7 @@
           <a:p>
             <a:pPr lvl="0" algn="ctr"/>
             <a:r>
-              <a:rPr lang="ru-RU" sz="2000" dirty="0" err="1">
+              <a:rPr lang="ru-RU" sz="2000" dirty="0">
                 <a:solidFill>
                   <a:schemeClr val="bg1"/>
                 </a:solidFill>
@@ -10511,7 +10563,7 @@
           <a:p>
             <a:pPr lvl="0" algn="ctr"/>
             <a:r>
-              <a:rPr lang="ru-RU" sz="2000" dirty="0" err="1">
+              <a:rPr lang="ru-RU" sz="2000" dirty="0">
                 <a:solidFill>
                   <a:schemeClr val="bg1"/>
                 </a:solidFill>
@@ -10527,7 +10579,7 @@
           <a:p>
             <a:pPr lvl="0" algn="ctr"/>
             <a:r>
-              <a:rPr lang="en-US" sz="2000" dirty="0" err="1">
+              <a:rPr lang="en-US" sz="2000" dirty="0">
                 <a:solidFill>
                   <a:schemeClr val="bg1"/>
                 </a:solidFill>
@@ -10543,7 +10595,7 @@
           <a:p>
             <a:pPr lvl="0" algn="ctr"/>
             <a:r>
-              <a:rPr lang="en-US" sz="2000" dirty="0" err="1">
+              <a:rPr lang="en-US" sz="2000" dirty="0">
                 <a:solidFill>
                   <a:schemeClr val="bg1"/>
                 </a:solidFill>
@@ -10559,7 +10611,7 @@
           <a:p>
             <a:pPr lvl="0" algn="ctr"/>
             <a:r>
-              <a:rPr lang="en-US" sz="2000" dirty="0" err="1">
+              <a:rPr lang="en-US" sz="2000" dirty="0">
                 <a:solidFill>
                   <a:schemeClr val="bg1"/>
                 </a:solidFill>
@@ -10591,7 +10643,7 @@
           <a:p>
             <a:pPr lvl="0" algn="ctr"/>
             <a:r>
-              <a:rPr lang="en-US" sz="2000" dirty="0" err="1">
+              <a:rPr lang="en-US" sz="2000" dirty="0">
                 <a:solidFill>
                   <a:schemeClr val="bg1"/>
                 </a:solidFill>
@@ -10607,7 +10659,7 @@
           <a:p>
             <a:pPr lvl="0" algn="ctr"/>
             <a:r>
-              <a:rPr lang="en-US" sz="2000" dirty="0" err="1">
+              <a:rPr lang="en-US" sz="2000" dirty="0">
                 <a:solidFill>
                   <a:schemeClr val="bg1"/>
                 </a:solidFill>
@@ -10623,7 +10675,7 @@
           <a:p>
             <a:pPr lvl="0" algn="ctr"/>
             <a:r>
-              <a:rPr lang="en-US" sz="2000" dirty="0" err="1">
+              <a:rPr lang="en-US" sz="2000" dirty="0">
                 <a:solidFill>
                   <a:schemeClr val="bg1"/>
                 </a:solidFill>
@@ -10682,7 +10734,7 @@
         </p:nvSpPr>
         <p:spPr>
           <a:xfrm>
-            <a:off x="2632143" y="146244"/>
+            <a:off x="2632141" y="91242"/>
             <a:ext cx="3943155" cy="561900"/>
           </a:xfrm>
           <a:prstGeom prst="rect">
@@ -10720,30 +10772,26 @@
       </p:sp>
       <p:pic>
         <p:nvPicPr>
-          <p:cNvPr id="162" name="Google Shape;162;p17"/>
-          <p:cNvPicPr preferRelativeResize="0"/>
+          <p:cNvPr id="3" name="Рисунок 2"/>
+          <p:cNvPicPr>
+            <a:picLocks noChangeAspect="1"/>
+          </p:cNvPicPr>
           <p:nvPr/>
         </p:nvPicPr>
         <p:blipFill>
-          <a:blip r:embed="rId3">
-            <a:alphaModFix/>
-          </a:blip>
+          <a:blip r:embed="rId3"/>
           <a:stretch>
             <a:fillRect/>
           </a:stretch>
         </p:blipFill>
         <p:spPr>
           <a:xfrm>
-            <a:off x="2193185" y="852523"/>
-            <a:ext cx="4929510" cy="3911982"/>
+            <a:off x="1798336" y="653142"/>
+            <a:ext cx="5610763" cy="4118314"/>
           </a:xfrm>
           <a:prstGeom prst="rect">
             <a:avLst/>
           </a:prstGeom>
-          <a:noFill/>
-          <a:ln>
-            <a:noFill/>
-          </a:ln>
         </p:spPr>
       </p:pic>
     </p:spTree>
@@ -10851,8 +10899,8 @@
         </p:nvSpPr>
         <p:spPr>
           <a:xfrm>
-            <a:off x="3499471" y="558754"/>
-            <a:ext cx="2062557" cy="561901"/>
+            <a:off x="2612572" y="469377"/>
+            <a:ext cx="4008233" cy="561901"/>
           </a:xfrm>
         </p:spPr>
         <p:txBody>
@@ -10866,7 +10914,7 @@
                 <a:latin typeface="Times New Roman" panose="02020603050405020304" pitchFamily="18" charset="0"/>
                 <a:cs typeface="Times New Roman" panose="02020603050405020304" pitchFamily="18" charset="0"/>
               </a:rPr>
-              <a:t>Заключение</a:t>
+              <a:t>Перспектива развития</a:t>
             </a:r>
             <a:endParaRPr lang="ru-RU" sz="2800" dirty="0">
               <a:latin typeface="Times New Roman" panose="02020603050405020304" pitchFamily="18" charset="0"/>
@@ -10887,8 +10935,8 @@
         </p:nvSpPr>
         <p:spPr>
           <a:xfrm>
-            <a:off x="1069737" y="1567550"/>
-            <a:ext cx="7038900" cy="2911200"/>
+            <a:off x="1276875" y="1780682"/>
+            <a:ext cx="7038900" cy="2096925"/>
           </a:xfrm>
         </p:spPr>
         <p:txBody>
@@ -10897,27 +10945,13 @@
           </a:bodyPr>
           <a:lstStyle/>
           <a:p>
-            <a:pPr marL="146050" indent="0">
-              <a:buNone/>
-            </a:pPr>
             <a:r>
               <a:rPr lang="ru-RU" sz="2400" dirty="0" smtClean="0">
                 <a:latin typeface="Times New Roman" panose="02020603050405020304" pitchFamily="18" charset="0"/>
                 <a:cs typeface="Times New Roman" panose="02020603050405020304" pitchFamily="18" charset="0"/>
               </a:rPr>
-              <a:t>Итоги работы</a:t>
+              <a:t>Добавить больше врагов и предметов</a:t>
             </a:r>
-            <a:r>
-              <a:rPr lang="en-US" sz="2400" dirty="0" smtClean="0">
-                <a:latin typeface="Times New Roman" panose="02020603050405020304" pitchFamily="18" charset="0"/>
-                <a:cs typeface="Times New Roman" panose="02020603050405020304" pitchFamily="18" charset="0"/>
-              </a:rPr>
-              <a:t>:</a:t>
-            </a:r>
-            <a:endParaRPr lang="ru-RU" sz="2400" dirty="0" smtClean="0">
-              <a:latin typeface="Times New Roman" panose="02020603050405020304" pitchFamily="18" charset="0"/>
-              <a:cs typeface="Times New Roman" panose="02020603050405020304" pitchFamily="18" charset="0"/>
-            </a:endParaRPr>
           </a:p>
           <a:p>
             <a:r>
@@ -10925,39 +10959,8 @@
                 <a:latin typeface="Times New Roman" panose="02020603050405020304" pitchFamily="18" charset="0"/>
                 <a:cs typeface="Times New Roman" panose="02020603050405020304" pitchFamily="18" charset="0"/>
               </a:rPr>
-              <a:t>Разработана игра в жанре </a:t>
+              <a:t>Увеличить количество уровней</a:t>
             </a:r>
-            <a:r>
-              <a:rPr lang="ru-RU" sz="2400" dirty="0" err="1" smtClean="0">
-                <a:latin typeface="Times New Roman" panose="02020603050405020304" pitchFamily="18" charset="0"/>
-                <a:cs typeface="Times New Roman" panose="02020603050405020304" pitchFamily="18" charset="0"/>
-              </a:rPr>
-              <a:t>платформер</a:t>
-            </a:r>
-            <a:endParaRPr lang="ru-RU" sz="2400" dirty="0" smtClean="0">
-              <a:latin typeface="Times New Roman" panose="02020603050405020304" pitchFamily="18" charset="0"/>
-              <a:cs typeface="Times New Roman" panose="02020603050405020304" pitchFamily="18" charset="0"/>
-            </a:endParaRPr>
-          </a:p>
-          <a:p>
-            <a:r>
-              <a:rPr lang="ru-RU" sz="2400" dirty="0">
-                <a:latin typeface="Times New Roman" panose="02020603050405020304" pitchFamily="18" charset="0"/>
-                <a:cs typeface="Times New Roman" panose="02020603050405020304" pitchFamily="18" charset="0"/>
-              </a:rPr>
-              <a:t>Реализован удобный </a:t>
-            </a:r>
-            <a:r>
-              <a:rPr lang="ru-RU" sz="2400" dirty="0" smtClean="0">
-                <a:latin typeface="Times New Roman" panose="02020603050405020304" pitchFamily="18" charset="0"/>
-                <a:cs typeface="Times New Roman" panose="02020603050405020304" pitchFamily="18" charset="0"/>
-              </a:rPr>
-              <a:t>интерфейс</a:t>
-            </a:r>
-            <a:endParaRPr lang="ru-RU" sz="2400" dirty="0" smtClean="0">
-              <a:latin typeface="Times New Roman" panose="02020603050405020304" pitchFamily="18" charset="0"/>
-              <a:cs typeface="Times New Roman" panose="02020603050405020304" pitchFamily="18" charset="0"/>
-            </a:endParaRPr>
           </a:p>
           <a:p>
             <a:r>
@@ -10965,11 +10968,25 @@
                 <a:latin typeface="Times New Roman" panose="02020603050405020304" pitchFamily="18" charset="0"/>
                 <a:cs typeface="Times New Roman" panose="02020603050405020304" pitchFamily="18" charset="0"/>
               </a:rPr>
-              <a:t>Сделаны настройки </a:t>
+              <a:t>Добавить </a:t>
+            </a:r>
+            <a:r>
+              <a:rPr lang="ru-RU" sz="2400" dirty="0" smtClean="0">
+                <a:latin typeface="Times New Roman" panose="02020603050405020304" pitchFamily="18" charset="0"/>
+                <a:cs typeface="Times New Roman" panose="02020603050405020304" pitchFamily="18" charset="0"/>
+              </a:rPr>
+              <a:t>сюжет</a:t>
             </a:r>
           </a:p>
           <a:p>
-            <a:endParaRPr lang="ru-RU" sz="2400" dirty="0" smtClean="0">
+            <a:r>
+              <a:rPr lang="ru-RU" sz="2400" dirty="0" smtClean="0">
+                <a:latin typeface="Times New Roman" panose="02020603050405020304" pitchFamily="18" charset="0"/>
+                <a:cs typeface="Times New Roman" panose="02020603050405020304" pitchFamily="18" charset="0"/>
+              </a:rPr>
+              <a:t>Улучшить таблицу рекордов</a:t>
+            </a:r>
+            <a:endParaRPr lang="ru-RU" sz="2400" dirty="0">
               <a:latin typeface="Times New Roman" panose="02020603050405020304" pitchFamily="18" charset="0"/>
               <a:cs typeface="Times New Roman" panose="02020603050405020304" pitchFamily="18" charset="0"/>
             </a:endParaRPr>
@@ -10979,7 +10996,7 @@
     </p:spTree>
     <p:extLst>
       <p:ext uri="{BB962C8B-B14F-4D97-AF65-F5344CB8AC3E}">
-        <p14:creationId xmlns:p14="http://schemas.microsoft.com/office/powerpoint/2010/main" val="1436223084"/>
+        <p14:creationId xmlns:p14="http://schemas.microsoft.com/office/powerpoint/2010/main" val="2376043047"/>
       </p:ext>
     </p:extLst>
   </p:cSld>
@@ -11025,8 +11042,8 @@
         </p:nvSpPr>
         <p:spPr>
           <a:xfrm>
-            <a:off x="2585071" y="586255"/>
-            <a:ext cx="4008233" cy="561901"/>
+            <a:off x="3444469" y="214995"/>
+            <a:ext cx="2062557" cy="561901"/>
           </a:xfrm>
         </p:spPr>
         <p:txBody>
@@ -11040,7 +11057,7 @@
                 <a:latin typeface="Times New Roman" panose="02020603050405020304" pitchFamily="18" charset="0"/>
                 <a:cs typeface="Times New Roman" panose="02020603050405020304" pitchFamily="18" charset="0"/>
               </a:rPr>
-              <a:t>Перспектива развития</a:t>
+              <a:t>Заключение</a:t>
             </a:r>
             <a:endParaRPr lang="ru-RU" sz="2800" dirty="0">
               <a:latin typeface="Times New Roman" panose="02020603050405020304" pitchFamily="18" charset="0"/>
@@ -11059,26 +11076,34 @@
             <p:ph type="body" idx="1"/>
           </p:nvPr>
         </p:nvSpPr>
-        <p:spPr/>
+        <p:spPr>
+          <a:xfrm>
+            <a:off x="1049112" y="1045034"/>
+            <a:ext cx="7038900" cy="3410087"/>
+          </a:xfrm>
+        </p:spPr>
         <p:txBody>
           <a:bodyPr>
             <a:normAutofit/>
           </a:bodyPr>
           <a:lstStyle/>
           <a:p>
+            <a:pPr marL="146050" indent="0">
+              <a:buNone/>
+            </a:pPr>
             <a:r>
               <a:rPr lang="ru-RU" sz="2400" dirty="0" smtClean="0">
                 <a:latin typeface="Times New Roman" panose="02020603050405020304" pitchFamily="18" charset="0"/>
                 <a:cs typeface="Times New Roman" panose="02020603050405020304" pitchFamily="18" charset="0"/>
               </a:rPr>
-              <a:t>Добавить больше </a:t>
+              <a:t>Итоги работы</a:t>
             </a:r>
             <a:r>
-              <a:rPr lang="ru-RU" sz="2400" dirty="0" smtClean="0">
+              <a:rPr lang="en-US" sz="2400" dirty="0" smtClean="0">
                 <a:latin typeface="Times New Roman" panose="02020603050405020304" pitchFamily="18" charset="0"/>
                 <a:cs typeface="Times New Roman" panose="02020603050405020304" pitchFamily="18" charset="0"/>
               </a:rPr>
-              <a:t>врагов и предметов</a:t>
+              <a:t>:</a:t>
             </a:r>
             <a:endParaRPr lang="ru-RU" sz="2400" dirty="0" smtClean="0">
               <a:latin typeface="Times New Roman" panose="02020603050405020304" pitchFamily="18" charset="0"/>
@@ -11091,18 +11116,151 @@
                 <a:latin typeface="Times New Roman" panose="02020603050405020304" pitchFamily="18" charset="0"/>
                 <a:cs typeface="Times New Roman" panose="02020603050405020304" pitchFamily="18" charset="0"/>
               </a:rPr>
-              <a:t>Увеличить количество уровней</a:t>
+              <a:t>Разработана игра в жанре </a:t>
+            </a:r>
+            <a:r>
+              <a:rPr lang="ru-RU" sz="2400" dirty="0" err="1" smtClean="0">
+                <a:latin typeface="Times New Roman" panose="02020603050405020304" pitchFamily="18" charset="0"/>
+                <a:cs typeface="Times New Roman" panose="02020603050405020304" pitchFamily="18" charset="0"/>
+              </a:rPr>
+              <a:t>платформер</a:t>
+            </a:r>
+            <a:r>
+              <a:rPr lang="en-US" sz="2400" dirty="0" smtClean="0">
+                <a:latin typeface="Times New Roman" panose="02020603050405020304" pitchFamily="18" charset="0"/>
+                <a:cs typeface="Times New Roman" panose="02020603050405020304" pitchFamily="18" charset="0"/>
+              </a:rPr>
+              <a:t>:</a:t>
+            </a:r>
+            <a:endParaRPr lang="ru-RU" sz="2400" dirty="0" smtClean="0">
+              <a:latin typeface="Times New Roman" panose="02020603050405020304" pitchFamily="18" charset="0"/>
+              <a:cs typeface="Times New Roman" panose="02020603050405020304" pitchFamily="18" charset="0"/>
+            </a:endParaRPr>
+          </a:p>
+          <a:p>
+            <a:pPr lvl="1">
+              <a:buFont typeface="Arial" panose="020B0604020202020204" pitchFamily="34" charset="0"/>
+              <a:buChar char="•"/>
+            </a:pPr>
+            <a:r>
+              <a:rPr lang="ru-RU" sz="2200" dirty="0" smtClean="0">
+                <a:latin typeface="Times New Roman" panose="02020603050405020304" pitchFamily="18" charset="0"/>
+                <a:cs typeface="Times New Roman" panose="02020603050405020304" pitchFamily="18" charset="0"/>
+              </a:rPr>
+              <a:t>Сделаны персонаж и препятствия</a:t>
+            </a:r>
+            <a:endParaRPr lang="en-US" sz="2200" dirty="0" smtClean="0">
+              <a:latin typeface="Times New Roman" panose="02020603050405020304" pitchFamily="18" charset="0"/>
+              <a:cs typeface="Times New Roman" panose="02020603050405020304" pitchFamily="18" charset="0"/>
+            </a:endParaRPr>
+          </a:p>
+          <a:p>
+            <a:pPr lvl="1">
+              <a:buFont typeface="Arial" panose="020B0604020202020204" pitchFamily="34" charset="0"/>
+              <a:buChar char="•"/>
+            </a:pPr>
+            <a:r>
+              <a:rPr lang="ru-RU" sz="2200" dirty="0" smtClean="0">
+                <a:latin typeface="Times New Roman" panose="02020603050405020304" pitchFamily="18" charset="0"/>
+                <a:cs typeface="Times New Roman" panose="02020603050405020304" pitchFamily="18" charset="0"/>
+              </a:rPr>
+              <a:t>Сделаны </a:t>
+            </a:r>
+            <a:r>
+              <a:rPr lang="ru-RU" sz="2200" dirty="0">
+                <a:latin typeface="Times New Roman" panose="02020603050405020304" pitchFamily="18" charset="0"/>
+                <a:cs typeface="Times New Roman" panose="02020603050405020304" pitchFamily="18" charset="0"/>
+              </a:rPr>
+              <a:t>анимации </a:t>
+            </a:r>
+            <a:endParaRPr lang="ru-RU" sz="2200" dirty="0" smtClean="0">
+              <a:latin typeface="Times New Roman" panose="02020603050405020304" pitchFamily="18" charset="0"/>
+              <a:cs typeface="Times New Roman" panose="02020603050405020304" pitchFamily="18" charset="0"/>
+            </a:endParaRPr>
+          </a:p>
+          <a:p>
+            <a:pPr lvl="1">
+              <a:buFont typeface="Arial" panose="020B0604020202020204" pitchFamily="34" charset="0"/>
+              <a:buChar char="•"/>
+            </a:pPr>
+            <a:r>
+              <a:rPr lang="ru-RU" sz="2200" dirty="0">
+                <a:latin typeface="Times New Roman" panose="02020603050405020304" pitchFamily="18" charset="0"/>
+                <a:cs typeface="Times New Roman" panose="02020603050405020304" pitchFamily="18" charset="0"/>
+              </a:rPr>
+              <a:t>Реализована система </a:t>
+            </a:r>
+            <a:r>
+              <a:rPr lang="ru-RU" sz="2200" dirty="0" smtClean="0">
+                <a:latin typeface="Times New Roman" panose="02020603050405020304" pitchFamily="18" charset="0"/>
+                <a:cs typeface="Times New Roman" panose="02020603050405020304" pitchFamily="18" charset="0"/>
+              </a:rPr>
+              <a:t>уровней</a:t>
             </a:r>
           </a:p>
           <a:p>
+            <a:pPr lvl="1">
+              <a:buFont typeface="Arial" panose="020B0604020202020204" pitchFamily="34" charset="0"/>
+              <a:buChar char="•"/>
+            </a:pPr>
             <a:r>
-              <a:rPr lang="ru-RU" sz="2400" dirty="0" smtClean="0">
+              <a:rPr lang="ru-RU" sz="2200" dirty="0" smtClean="0">
                 <a:latin typeface="Times New Roman" panose="02020603050405020304" pitchFamily="18" charset="0"/>
                 <a:cs typeface="Times New Roman" panose="02020603050405020304" pitchFamily="18" charset="0"/>
               </a:rPr>
-              <a:t>Добавить сюжет</a:t>
+              <a:t>Создан </a:t>
             </a:r>
-            <a:endParaRPr lang="ru-RU" sz="2400" dirty="0">
+            <a:r>
+              <a:rPr lang="en-US" sz="2200" dirty="0" smtClean="0">
+                <a:latin typeface="Times New Roman" panose="02020603050405020304" pitchFamily="18" charset="0"/>
+                <a:cs typeface="Times New Roman" panose="02020603050405020304" pitchFamily="18" charset="0"/>
+              </a:rPr>
+              <a:t>UI-</a:t>
+            </a:r>
+            <a:r>
+              <a:rPr lang="ru-RU" sz="2200" dirty="0" smtClean="0">
+                <a:latin typeface="Times New Roman" panose="02020603050405020304" pitchFamily="18" charset="0"/>
+                <a:cs typeface="Times New Roman" panose="02020603050405020304" pitchFamily="18" charset="0"/>
+              </a:rPr>
+              <a:t>интерфейс</a:t>
+            </a:r>
+            <a:endParaRPr lang="ru-RU" sz="2200" dirty="0" smtClean="0">
+              <a:latin typeface="Times New Roman" panose="02020603050405020304" pitchFamily="18" charset="0"/>
+              <a:cs typeface="Times New Roman" panose="02020603050405020304" pitchFamily="18" charset="0"/>
+            </a:endParaRPr>
+          </a:p>
+          <a:p>
+            <a:pPr lvl="1">
+              <a:buFont typeface="Arial" panose="020B0604020202020204" pitchFamily="34" charset="0"/>
+              <a:buChar char="•"/>
+            </a:pPr>
+            <a:r>
+              <a:rPr lang="ru-RU" sz="2200" dirty="0" smtClean="0">
+                <a:latin typeface="Times New Roman" panose="02020603050405020304" pitchFamily="18" charset="0"/>
+                <a:cs typeface="Times New Roman" panose="02020603050405020304" pitchFamily="18" charset="0"/>
+              </a:rPr>
+              <a:t>Добавлены настройки</a:t>
+            </a:r>
+          </a:p>
+          <a:p>
+            <a:pPr lvl="1">
+              <a:buFont typeface="Arial" panose="020B0604020202020204" pitchFamily="34" charset="0"/>
+              <a:buChar char="•"/>
+            </a:pPr>
+            <a:r>
+              <a:rPr lang="ru-RU" sz="2200" dirty="0" smtClean="0">
+                <a:latin typeface="Times New Roman" panose="02020603050405020304" pitchFamily="18" charset="0"/>
+                <a:cs typeface="Times New Roman" panose="02020603050405020304" pitchFamily="18" charset="0"/>
+              </a:rPr>
+              <a:t>Сделана база данных для хранения рекордов</a:t>
+            </a:r>
+          </a:p>
+          <a:p>
+            <a:pPr lvl="1">
+              <a:buFont typeface="Arial" panose="020B0604020202020204" pitchFamily="34" charset="0"/>
+              <a:buChar char="•"/>
+            </a:pPr>
+            <a:endParaRPr lang="ru-RU" sz="2200" dirty="0" smtClean="0">
               <a:latin typeface="Times New Roman" panose="02020603050405020304" pitchFamily="18" charset="0"/>
               <a:cs typeface="Times New Roman" panose="02020603050405020304" pitchFamily="18" charset="0"/>
             </a:endParaRPr>
@@ -11112,7 +11270,7 @@
     </p:spTree>
     <p:extLst>
       <p:ext uri="{BB962C8B-B14F-4D97-AF65-F5344CB8AC3E}">
-        <p14:creationId xmlns:p14="http://schemas.microsoft.com/office/powerpoint/2010/main" val="2376043047"/>
+        <p14:creationId xmlns:p14="http://schemas.microsoft.com/office/powerpoint/2010/main" val="1436223084"/>
       </p:ext>
     </p:extLst>
   </p:cSld>
@@ -11228,6 +11386,13 @@
   <p:clrMapOvr>
     <a:masterClrMapping/>
   </p:clrMapOvr>
+  <p:timing>
+    <p:tnLst>
+      <p:par>
+        <p:cTn id="1" dur="indefinite" restart="never" nodeType="tmRoot"/>
+      </p:par>
+    </p:tnLst>
+  </p:timing>
 </p:sld>
 </file>
 

--- a/documentation/Fish Hunter.pptx
+++ b/documentation/Fish Hunter.pptx
@@ -9347,7 +9347,7 @@
         </p:nvSpPr>
         <p:spPr>
           <a:xfrm>
-            <a:off x="3244954" y="1681527"/>
+            <a:off x="3299955" y="1674652"/>
             <a:ext cx="3159283" cy="821041"/>
           </a:xfrm>
           <a:prstGeom prst="rect">
@@ -9395,8 +9395,8 @@
         </p:nvSpPr>
         <p:spPr>
           <a:xfrm>
-            <a:off x="5830158" y="3535437"/>
-            <a:ext cx="2564446" cy="1050314"/>
+            <a:off x="5617029" y="3535437"/>
+            <a:ext cx="2777575" cy="1050314"/>
           </a:xfrm>
           <a:prstGeom prst="rect">
             <a:avLst/>
@@ -9418,20 +9418,20 @@
               <a:buNone/>
             </a:pPr>
             <a:r>
-              <a:rPr lang="ru" sz="1800" dirty="0">
+              <a:rPr lang="ru" sz="2000" dirty="0">
                 <a:latin typeface="Times New Roman" panose="02020603050405020304" pitchFamily="18" charset="0"/>
                 <a:cs typeface="Times New Roman" panose="02020603050405020304" pitchFamily="18" charset="0"/>
               </a:rPr>
               <a:t>Авторы</a:t>
             </a:r>
             <a:r>
-              <a:rPr lang="ru" sz="1800" dirty="0" smtClean="0">
+              <a:rPr lang="ru" sz="2000" dirty="0" smtClean="0">
                 <a:latin typeface="Times New Roman" panose="02020603050405020304" pitchFamily="18" charset="0"/>
                 <a:cs typeface="Times New Roman" panose="02020603050405020304" pitchFamily="18" charset="0"/>
               </a:rPr>
               <a:t>:</a:t>
             </a:r>
-            <a:endParaRPr lang="en-US" sz="1800" dirty="0" smtClean="0">
+            <a:endParaRPr lang="en-US" sz="2000" dirty="0" smtClean="0">
               <a:latin typeface="Times New Roman" panose="02020603050405020304" pitchFamily="18" charset="0"/>
               <a:cs typeface="Times New Roman" panose="02020603050405020304" pitchFamily="18" charset="0"/>
             </a:endParaRPr>
@@ -9447,34 +9447,34 @@
               <a:buNone/>
             </a:pPr>
             <a:r>
-              <a:rPr lang="ru" sz="1800" dirty="0" smtClean="0">
+              <a:rPr lang="ru" sz="2000" dirty="0" smtClean="0">
                 <a:latin typeface="Times New Roman" panose="02020603050405020304" pitchFamily="18" charset="0"/>
                 <a:cs typeface="Times New Roman" panose="02020603050405020304" pitchFamily="18" charset="0"/>
               </a:rPr>
               <a:t>Шпаковский Вячеслав</a:t>
             </a:r>
             <a:r>
-              <a:rPr lang="en-US" sz="1800" dirty="0" smtClean="0">
+              <a:rPr lang="en-US" sz="2000" dirty="0" smtClean="0">
                 <a:latin typeface="Times New Roman" panose="02020603050405020304" pitchFamily="18" charset="0"/>
                 <a:cs typeface="Times New Roman" panose="02020603050405020304" pitchFamily="18" charset="0"/>
               </a:rPr>
               <a:t> </a:t>
             </a:r>
             <a:r>
-              <a:rPr lang="ru" sz="1800" dirty="0" smtClean="0">
+              <a:rPr lang="ru" sz="2000" dirty="0" smtClean="0">
                 <a:latin typeface="Times New Roman" panose="02020603050405020304" pitchFamily="18" charset="0"/>
                 <a:cs typeface="Times New Roman" panose="02020603050405020304" pitchFamily="18" charset="0"/>
               </a:rPr>
               <a:t>Мажоров </a:t>
             </a:r>
             <a:r>
-              <a:rPr lang="ru" sz="1800" dirty="0">
+              <a:rPr lang="ru" sz="2000" dirty="0">
                 <a:latin typeface="Times New Roman" panose="02020603050405020304" pitchFamily="18" charset="0"/>
                 <a:cs typeface="Times New Roman" panose="02020603050405020304" pitchFamily="18" charset="0"/>
               </a:rPr>
               <a:t>Арсений</a:t>
             </a:r>
-            <a:endParaRPr sz="1800" dirty="0">
+            <a:endParaRPr sz="2000" dirty="0">
               <a:latin typeface="Times New Roman" panose="02020603050405020304" pitchFamily="18" charset="0"/>
               <a:cs typeface="Times New Roman" panose="02020603050405020304" pitchFamily="18" charset="0"/>
             </a:endParaRPr>
@@ -9583,8 +9583,8 @@
         </p:nvSpPr>
         <p:spPr>
           <a:xfrm>
-            <a:off x="263071" y="1266599"/>
-            <a:ext cx="4267678" cy="3415404"/>
+            <a:off x="256196" y="1218473"/>
+            <a:ext cx="4267678" cy="3649160"/>
           </a:xfrm>
           <a:prstGeom prst="rect">
             <a:avLst/>
@@ -9610,7 +9610,7 @@
               <a:buNone/>
             </a:pPr>
             <a:r>
-              <a:rPr lang="ru" u="sng" dirty="0" smtClean="0">
+              <a:rPr lang="ru" sz="2000" u="sng" dirty="0" smtClean="0">
                 <a:solidFill>
                   <a:schemeClr val="lt1"/>
                 </a:solidFill>
@@ -9622,7 +9622,7 @@
               <a:t>Цель проекта</a:t>
             </a:r>
             <a:r>
-              <a:rPr lang="en-US" dirty="0" smtClean="0">
+              <a:rPr lang="en-US" sz="2000" dirty="0" smtClean="0">
                 <a:solidFill>
                   <a:schemeClr val="lt1"/>
                 </a:solidFill>
@@ -9645,7 +9645,7 @@
               <a:buNone/>
             </a:pPr>
             <a:r>
-              <a:rPr lang="ru-RU" dirty="0" smtClean="0">
+              <a:rPr lang="ru-RU" sz="1600" dirty="0" smtClean="0">
                 <a:solidFill>
                   <a:schemeClr val="lt1"/>
                 </a:solidFill>
@@ -9657,7 +9657,7 @@
               <a:t>Разработать игру</a:t>
             </a:r>
             <a:r>
-              <a:rPr lang="en-US" dirty="0" smtClean="0">
+              <a:rPr lang="en-US" sz="1600" dirty="0" smtClean="0">
                 <a:solidFill>
                   <a:schemeClr val="lt1"/>
                 </a:solidFill>
@@ -9669,7 +9669,7 @@
               <a:t>,</a:t>
             </a:r>
             <a:r>
-              <a:rPr lang="ru-RU" dirty="0" smtClean="0">
+              <a:rPr lang="ru-RU" sz="1600" dirty="0" smtClean="0">
                 <a:solidFill>
                   <a:schemeClr val="lt1"/>
                 </a:solidFill>
@@ -9678,22 +9678,10 @@
                 <a:cs typeface="Times New Roman" panose="02020603050405020304" pitchFamily="18" charset="0"/>
                 <a:sym typeface="Lato"/>
               </a:rPr>
-              <a:t> в жанре </a:t>
+              <a:t> в жанре платформер</a:t>
             </a:r>
             <a:r>
-              <a:rPr lang="ru-RU" dirty="0" smtClean="0">
-                <a:solidFill>
-                  <a:schemeClr val="lt1"/>
-                </a:solidFill>
-                <a:latin typeface="Times New Roman" panose="02020603050405020304" pitchFamily="18" charset="0"/>
-                <a:ea typeface="Lato"/>
-                <a:cs typeface="Times New Roman" panose="02020603050405020304" pitchFamily="18" charset="0"/>
-                <a:sym typeface="Lato"/>
-              </a:rPr>
-              <a:t>платформер</a:t>
-            </a:r>
-            <a:r>
-              <a:rPr lang="en-US" dirty="0" smtClean="0">
+              <a:rPr lang="en-US" sz="1600" dirty="0" smtClean="0">
                 <a:solidFill>
                   <a:schemeClr val="lt1"/>
                 </a:solidFill>
@@ -9705,7 +9693,7 @@
               <a:t>, </a:t>
             </a:r>
             <a:r>
-              <a:rPr lang="ru-RU" dirty="0" smtClean="0">
+              <a:rPr lang="ru-RU" sz="1600" dirty="0" smtClean="0">
                 <a:solidFill>
                   <a:schemeClr val="lt1"/>
                 </a:solidFill>
@@ -9717,7 +9705,7 @@
               <a:t>являющейся аналогом игр серии </a:t>
             </a:r>
             <a:r>
-              <a:rPr lang="en-US" dirty="0" smtClean="0">
+              <a:rPr lang="en-US" sz="1600" dirty="0" smtClean="0">
                 <a:solidFill>
                   <a:schemeClr val="lt1"/>
                 </a:solidFill>
@@ -9726,21 +9714,9 @@
                 <a:cs typeface="Times New Roman" panose="02020603050405020304" pitchFamily="18" charset="0"/>
                 <a:sym typeface="Lato"/>
               </a:rPr>
-              <a:t>Super Mario Bros</a:t>
+              <a:t>Super Mario Bros.</a:t>
             </a:r>
-            <a:r>
-              <a:rPr lang="en-US" dirty="0" smtClean="0">
-                <a:solidFill>
-                  <a:schemeClr val="lt1"/>
-                </a:solidFill>
-                <a:latin typeface="Times New Roman" panose="02020603050405020304" pitchFamily="18" charset="0"/>
-                <a:ea typeface="Lato"/>
-                <a:cs typeface="Times New Roman" panose="02020603050405020304" pitchFamily="18" charset="0"/>
-                <a:sym typeface="Lato"/>
-              </a:rPr>
-              <a:t>.</a:t>
-            </a:r>
-            <a:endParaRPr lang="ru-RU" dirty="0" smtClean="0">
+            <a:endParaRPr lang="ru-RU" sz="1600" dirty="0" smtClean="0">
               <a:solidFill>
                 <a:schemeClr val="lt1"/>
               </a:solidFill>
@@ -9760,7 +9736,7 @@
               </a:spcAft>
               <a:buNone/>
             </a:pPr>
-            <a:endParaRPr lang="en-US" dirty="0" smtClean="0">
+            <a:endParaRPr lang="en-US" sz="1600" dirty="0" smtClean="0">
               <a:solidFill>
                 <a:schemeClr val="lt1"/>
               </a:solidFill>
@@ -9781,7 +9757,7 @@
               <a:buNone/>
             </a:pPr>
             <a:r>
-              <a:rPr lang="ru-RU" u="sng" dirty="0" smtClean="0">
+              <a:rPr lang="ru-RU" sz="1800" u="sng" dirty="0" smtClean="0">
                 <a:solidFill>
                   <a:schemeClr val="lt1"/>
                 </a:solidFill>
@@ -9793,7 +9769,7 @@
               <a:t>Задачи проекта</a:t>
             </a:r>
             <a:r>
-              <a:rPr lang="en-US" dirty="0" smtClean="0">
+              <a:rPr lang="en-US" sz="1800" dirty="0" smtClean="0">
                 <a:solidFill>
                   <a:schemeClr val="lt1"/>
                 </a:solidFill>
@@ -9816,7 +9792,7 @@
               <a:buNone/>
             </a:pPr>
             <a:r>
-              <a:rPr lang="en-US" dirty="0" smtClean="0">
+              <a:rPr lang="en-US" sz="1600" dirty="0" smtClean="0">
                 <a:solidFill>
                   <a:schemeClr val="lt1"/>
                 </a:solidFill>
@@ -9828,7 +9804,7 @@
               <a:t>1)</a:t>
             </a:r>
             <a:r>
-              <a:rPr lang="ru-RU" dirty="0" smtClean="0">
+              <a:rPr lang="ru-RU" sz="1600" dirty="0" smtClean="0">
                 <a:solidFill>
                   <a:schemeClr val="lt1"/>
                 </a:solidFill>
@@ -9837,67 +9813,9 @@
                 <a:cs typeface="Times New Roman" panose="02020603050405020304" pitchFamily="18" charset="0"/>
                 <a:sym typeface="Lato"/>
               </a:rPr>
-              <a:t>Реализовать движение персонажа (на тот момент примитива)</a:t>
+              <a:t> Реализовать движение персонажа </a:t>
             </a:r>
-          </a:p>
-          <a:p>
-            <a:pPr marL="0" lvl="0" indent="0" rtl="0">
-              <a:spcBef>
-                <a:spcPts val="0"/>
-              </a:spcBef>
-              <a:spcAft>
-                <a:spcPts val="0"/>
-              </a:spcAft>
-              <a:buNone/>
-            </a:pPr>
-            <a:r>
-              <a:rPr lang="ru-RU" dirty="0" smtClean="0">
-                <a:solidFill>
-                  <a:schemeClr val="lt1"/>
-                </a:solidFill>
-                <a:latin typeface="Times New Roman" panose="02020603050405020304" pitchFamily="18" charset="0"/>
-                <a:ea typeface="Lato"/>
-                <a:cs typeface="Times New Roman" panose="02020603050405020304" pitchFamily="18" charset="0"/>
-                <a:sym typeface="Lato"/>
-              </a:rPr>
-              <a:t>2)Найти спрайты</a:t>
-            </a:r>
-          </a:p>
-          <a:p>
-            <a:pPr marL="0" lvl="0" indent="0" rtl="0">
-              <a:spcBef>
-                <a:spcPts val="0"/>
-              </a:spcBef>
-              <a:spcAft>
-                <a:spcPts val="0"/>
-              </a:spcAft>
-              <a:buNone/>
-            </a:pPr>
-            <a:r>
-              <a:rPr lang="ru-RU" dirty="0" smtClean="0">
-                <a:solidFill>
-                  <a:schemeClr val="lt1"/>
-                </a:solidFill>
-                <a:latin typeface="Times New Roman" panose="02020603050405020304" pitchFamily="18" charset="0"/>
-                <a:ea typeface="Lato"/>
-                <a:cs typeface="Times New Roman" panose="02020603050405020304" pitchFamily="18" charset="0"/>
-                <a:sym typeface="Lato"/>
-              </a:rPr>
-              <a:t>3)Добавить препятствия</a:t>
-            </a:r>
-            <a:r>
-              <a:rPr lang="en-US" dirty="0" smtClean="0">
-                <a:solidFill>
-                  <a:schemeClr val="lt1"/>
-                </a:solidFill>
-                <a:latin typeface="Times New Roman" panose="02020603050405020304" pitchFamily="18" charset="0"/>
-                <a:ea typeface="Lato"/>
-                <a:cs typeface="Times New Roman" panose="02020603050405020304" pitchFamily="18" charset="0"/>
-                <a:sym typeface="Lato"/>
-              </a:rPr>
-              <a:t>:</a:t>
-            </a:r>
-            <a:endParaRPr lang="ru-RU" dirty="0" smtClean="0">
+            <a:endParaRPr lang="ru-RU" sz="1600" dirty="0">
               <a:solidFill>
                 <a:schemeClr val="lt1"/>
               </a:solidFill>
@@ -9918,7 +9836,7 @@
               <a:buNone/>
             </a:pPr>
             <a:r>
-              <a:rPr lang="ru-RU" dirty="0" smtClean="0">
+              <a:rPr lang="ru-RU" sz="1600" dirty="0" smtClean="0">
                 <a:solidFill>
                   <a:schemeClr val="lt1"/>
                 </a:solidFill>
@@ -9927,7 +9845,7 @@
                 <a:cs typeface="Times New Roman" panose="02020603050405020304" pitchFamily="18" charset="0"/>
                 <a:sym typeface="Lato"/>
               </a:rPr>
-              <a:t>4)Добавить предметы</a:t>
+              <a:t>2) Найти спрайты</a:t>
             </a:r>
           </a:p>
           <a:p>
@@ -9941,7 +9859,7 @@
               <a:buNone/>
             </a:pPr>
             <a:r>
-              <a:rPr lang="ru-RU" dirty="0" smtClean="0">
+              <a:rPr lang="ru-RU" sz="1600" dirty="0" smtClean="0">
                 <a:solidFill>
                   <a:schemeClr val="lt1"/>
                 </a:solidFill>
@@ -9950,7 +9868,7 @@
                 <a:cs typeface="Times New Roman" panose="02020603050405020304" pitchFamily="18" charset="0"/>
                 <a:sym typeface="Lato"/>
               </a:rPr>
-              <a:t>5)Сделать базу данных для рекордов</a:t>
+              <a:t>3) Добавить препятствия</a:t>
             </a:r>
           </a:p>
           <a:p>
@@ -9964,7 +9882,7 @@
               <a:buNone/>
             </a:pPr>
             <a:r>
-              <a:rPr lang="ru-RU" dirty="0" smtClean="0">
+              <a:rPr lang="ru-RU" sz="1600" dirty="0" smtClean="0">
                 <a:solidFill>
                   <a:schemeClr val="lt1"/>
                 </a:solidFill>
@@ -9973,7 +9891,7 @@
                 <a:cs typeface="Times New Roman" panose="02020603050405020304" pitchFamily="18" charset="0"/>
                 <a:sym typeface="Lato"/>
               </a:rPr>
-              <a:t>6)Сделать систему частиц для фейерверков</a:t>
+              <a:t>4) Добавить предметы</a:t>
             </a:r>
           </a:p>
           <a:p>
@@ -9987,7 +9905,7 @@
               <a:buNone/>
             </a:pPr>
             <a:r>
-              <a:rPr lang="ru-RU" dirty="0" smtClean="0">
+              <a:rPr lang="ru-RU" sz="1600" dirty="0" smtClean="0">
                 <a:solidFill>
                   <a:schemeClr val="lt1"/>
                 </a:solidFill>
@@ -9996,7 +9914,7 @@
                 <a:cs typeface="Times New Roman" panose="02020603050405020304" pitchFamily="18" charset="0"/>
                 <a:sym typeface="Lato"/>
               </a:rPr>
-              <a:t>7)Сделать настройки</a:t>
+              <a:t>5) Сделать базу данных для рекордов</a:t>
             </a:r>
           </a:p>
           <a:p>
@@ -10010,7 +9928,7 @@
               <a:buNone/>
             </a:pPr>
             <a:r>
-              <a:rPr lang="ru-RU" dirty="0" smtClean="0">
+              <a:rPr lang="ru-RU" sz="1600" dirty="0" smtClean="0">
                 <a:solidFill>
                   <a:schemeClr val="lt1"/>
                 </a:solidFill>
@@ -10019,10 +9937,56 @@
                 <a:cs typeface="Times New Roman" panose="02020603050405020304" pitchFamily="18" charset="0"/>
                 <a:sym typeface="Lato"/>
               </a:rPr>
-              <a:t>8)Собрать </a:t>
+              <a:t>6) Сделать систему частиц для фейерверков</a:t>
+            </a:r>
+          </a:p>
+          <a:p>
+            <a:pPr marL="0" lvl="0" indent="0" rtl="0">
+              <a:spcBef>
+                <a:spcPts val="0"/>
+              </a:spcBef>
+              <a:spcAft>
+                <a:spcPts val="0"/>
+              </a:spcAft>
+              <a:buNone/>
+            </a:pPr>
+            <a:r>
+              <a:rPr lang="ru-RU" sz="1600" dirty="0" smtClean="0">
+                <a:solidFill>
+                  <a:schemeClr val="lt1"/>
+                </a:solidFill>
+                <a:latin typeface="Times New Roman" panose="02020603050405020304" pitchFamily="18" charset="0"/>
+                <a:ea typeface="Lato"/>
+                <a:cs typeface="Times New Roman" panose="02020603050405020304" pitchFamily="18" charset="0"/>
+                <a:sym typeface="Lato"/>
+              </a:rPr>
+              <a:t>7) Сделать настройки</a:t>
+            </a:r>
+          </a:p>
+          <a:p>
+            <a:pPr marL="0" lvl="0" indent="0" rtl="0">
+              <a:spcBef>
+                <a:spcPts val="0"/>
+              </a:spcBef>
+              <a:spcAft>
+                <a:spcPts val="0"/>
+              </a:spcAft>
+              <a:buNone/>
+            </a:pPr>
+            <a:r>
+              <a:rPr lang="ru-RU" sz="1600" dirty="0" smtClean="0">
+                <a:solidFill>
+                  <a:schemeClr val="lt1"/>
+                </a:solidFill>
+                <a:latin typeface="Times New Roman" panose="02020603050405020304" pitchFamily="18" charset="0"/>
+                <a:ea typeface="Lato"/>
+                <a:cs typeface="Times New Roman" panose="02020603050405020304" pitchFamily="18" charset="0"/>
+                <a:sym typeface="Lato"/>
+              </a:rPr>
+              <a:t>8) Собрать </a:t>
             </a:r>
             <a:r>
-              <a:rPr lang="en-US" dirty="0" smtClean="0">
+              <a:rPr lang="en-US" sz="1600" dirty="0" smtClean="0">
                 <a:solidFill>
                   <a:schemeClr val="lt1"/>
                 </a:solidFill>
@@ -10034,7 +9998,7 @@
               <a:t>exe </a:t>
             </a:r>
             <a:r>
-              <a:rPr lang="ru-RU" dirty="0" smtClean="0">
+              <a:rPr lang="ru-RU" sz="1600" dirty="0" smtClean="0">
                 <a:solidFill>
                   <a:schemeClr val="lt1"/>
                 </a:solidFill>
@@ -10297,15 +10261,7 @@
           </a:bodyPr>
           <a:lstStyle/>
           <a:p>
-            <a:pPr marL="0" lvl="0" indent="0" rtl="0">
-              <a:spcBef>
-                <a:spcPts val="0"/>
-              </a:spcBef>
-              <a:spcAft>
-                <a:spcPts val="0"/>
-              </a:spcAft>
-              <a:buNone/>
-            </a:pPr>
+            <a:pPr lvl="0"/>
             <a:r>
               <a:rPr lang="ru" sz="2000" dirty="0" smtClean="0">
                 <a:solidFill>
@@ -10316,7 +10272,15 @@
                 <a:cs typeface="Times New Roman" panose="02020603050405020304" pitchFamily="18" charset="0"/>
                 <a:sym typeface="Lato"/>
               </a:rPr>
-              <a:t>Платформер - один из старейших и известнейших жанров игр, но кто сказал, что они устарели</a:t>
+              <a:t>Платформер </a:t>
+            </a:r>
+            <a:r>
+              <a:rPr lang="ru-RU" dirty="0">
+                <a:solidFill>
+                  <a:schemeClr val="bg1"/>
+                </a:solidFill>
+              </a:rPr>
+              <a:t>—</a:t>
             </a:r>
             <a:r>
               <a:rPr lang="ru" sz="2000" dirty="0" smtClean="0">
@@ -10328,7 +10292,19 @@
                 <a:cs typeface="Times New Roman" panose="02020603050405020304" pitchFamily="18" charset="0"/>
                 <a:sym typeface="Lato"/>
               </a:rPr>
-              <a:t>?</a:t>
+              <a:t> </a:t>
+            </a:r>
+            <a:r>
+              <a:rPr lang="ru" sz="2000" dirty="0" smtClean="0">
+                <a:solidFill>
+                  <a:schemeClr val="lt1"/>
+                </a:solidFill>
+                <a:latin typeface="Times New Roman" panose="02020603050405020304" pitchFamily="18" charset="0"/>
+                <a:ea typeface="Lato"/>
+                <a:cs typeface="Times New Roman" panose="02020603050405020304" pitchFamily="18" charset="0"/>
+                <a:sym typeface="Lato"/>
+              </a:rPr>
+              <a:t>один из старейших и известнейших жанров игр, но кто сказал, что они устарели?</a:t>
             </a:r>
           </a:p>
           <a:p>
@@ -10353,15 +10329,6 @@
               </a:rPr>
               <a:t> </a:t>
             </a:r>
-            <a:endParaRPr lang="ru" sz="2000" dirty="0" smtClean="0">
-              <a:solidFill>
-                <a:schemeClr val="lt1"/>
-              </a:solidFill>
-              <a:latin typeface="Times New Roman" panose="02020603050405020304" pitchFamily="18" charset="0"/>
-              <a:ea typeface="Lato"/>
-              <a:cs typeface="Times New Roman" panose="02020603050405020304" pitchFamily="18" charset="0"/>
-              <a:sym typeface="Lato"/>
-            </a:endParaRPr>
           </a:p>
           <a:p>
             <a:pPr marL="0" lvl="0" indent="0" algn="l" rtl="0">
@@ -10429,7 +10396,7 @@
         </p:nvSpPr>
         <p:spPr>
           <a:xfrm>
-            <a:off x="2321281" y="166868"/>
+            <a:off x="2190652" y="180618"/>
             <a:ext cx="4958921" cy="637528"/>
           </a:xfrm>
           <a:prstGeom prst="rect">
@@ -10473,7 +10440,7 @@
         </p:nvSpPr>
         <p:spPr>
           <a:xfrm>
-            <a:off x="3860700" y="948775"/>
+            <a:off x="3730071" y="1024402"/>
             <a:ext cx="1880081" cy="3451346"/>
           </a:xfrm>
           <a:prstGeom prst="rect">
@@ -10540,40 +10507,123 @@
                 <a:solidFill>
                   <a:schemeClr val="bg1"/>
                 </a:solidFill>
+                <a:latin typeface="Times New Roman" panose="02020603050405020304" pitchFamily="18" charset="0"/>
+                <a:cs typeface="Times New Roman" panose="02020603050405020304" pitchFamily="18" charset="0"/>
               </a:rPr>
               <a:t>Arcade</a:t>
+            </a:r>
+          </a:p>
+          <a:p>
+            <a:pPr lvl="0" algn="ctr"/>
+            <a:r>
+              <a:rPr lang="en-US" sz="2000" dirty="0" smtClean="0">
+                <a:solidFill>
+                  <a:schemeClr val="bg1"/>
+                </a:solidFill>
+                <a:latin typeface="Times New Roman" panose="02020603050405020304" pitchFamily="18" charset="0"/>
+                <a:cs typeface="Times New Roman" panose="02020603050405020304" pitchFamily="18" charset="0"/>
+              </a:rPr>
+              <a:t>s</a:t>
+            </a:r>
+            <a:r>
+              <a:rPr lang="ru-RU" sz="2000" dirty="0" smtClean="0">
+                <a:solidFill>
+                  <a:schemeClr val="bg1"/>
+                </a:solidFill>
+                <a:latin typeface="Times New Roman" panose="02020603050405020304" pitchFamily="18" charset="0"/>
+                <a:cs typeface="Times New Roman" panose="02020603050405020304" pitchFamily="18" charset="0"/>
+              </a:rPr>
+              <a:t>qlite3</a:t>
+            </a:r>
+          </a:p>
+          <a:p>
+            <a:pPr algn="ctr"/>
+            <a:r>
+              <a:rPr lang="en-US" sz="2000" dirty="0" err="1" smtClean="0">
+                <a:solidFill>
+                  <a:schemeClr val="bg1"/>
+                </a:solidFill>
+                <a:latin typeface="Times New Roman" panose="02020603050405020304" pitchFamily="18" charset="0"/>
+                <a:cs typeface="Times New Roman" panose="02020603050405020304" pitchFamily="18" charset="0"/>
+              </a:rPr>
+              <a:t>json</a:t>
             </a:r>
             <a:endParaRPr lang="ru-RU" sz="2000" dirty="0">
               <a:solidFill>
                 <a:schemeClr val="bg1"/>
               </a:solidFill>
+              <a:latin typeface="Times New Roman" panose="02020603050405020304" pitchFamily="18" charset="0"/>
+              <a:cs typeface="Times New Roman" panose="02020603050405020304" pitchFamily="18" charset="0"/>
+            </a:endParaRPr>
+          </a:p>
+          <a:p>
+            <a:pPr algn="ctr"/>
+            <a:r>
+              <a:rPr lang="en-US" sz="2000" dirty="0" err="1" smtClean="0">
+                <a:solidFill>
+                  <a:schemeClr val="bg1"/>
+                </a:solidFill>
+                <a:latin typeface="Times New Roman" panose="02020603050405020304" pitchFamily="18" charset="0"/>
+                <a:cs typeface="Times New Roman" panose="02020603050405020304" pitchFamily="18" charset="0"/>
+              </a:rPr>
+              <a:t>pyglet</a:t>
+            </a:r>
+            <a:endParaRPr lang="ru-RU" sz="2000" dirty="0">
+              <a:solidFill>
+                <a:schemeClr val="bg1"/>
+              </a:solidFill>
+              <a:latin typeface="Times New Roman" panose="02020603050405020304" pitchFamily="18" charset="0"/>
+              <a:cs typeface="Times New Roman" panose="02020603050405020304" pitchFamily="18" charset="0"/>
             </a:endParaRPr>
           </a:p>
           <a:p>
             <a:pPr lvl="0" algn="ctr"/>
             <a:r>
-              <a:rPr lang="ru-RU" sz="2000" dirty="0">
+              <a:rPr lang="ru-RU" sz="2000" dirty="0" err="1">
                 <a:solidFill>
                   <a:schemeClr val="bg1"/>
                 </a:solidFill>
+                <a:latin typeface="Times New Roman" panose="02020603050405020304" pitchFamily="18" charset="0"/>
+                <a:cs typeface="Times New Roman" panose="02020603050405020304" pitchFamily="18" charset="0"/>
               </a:rPr>
-              <a:t>sqlite3</a:t>
+              <a:t>random</a:t>
             </a:r>
-          </a:p>
-          <a:p>
-            <a:pPr lvl="0" algn="ctr"/>
             <a:r>
               <a:rPr lang="ru-RU" sz="2000" dirty="0">
                 <a:solidFill>
                   <a:schemeClr val="bg1"/>
                 </a:solidFill>
+                <a:latin typeface="Times New Roman" panose="02020603050405020304" pitchFamily="18" charset="0"/>
+                <a:cs typeface="Times New Roman" panose="02020603050405020304" pitchFamily="18" charset="0"/>
               </a:rPr>
-              <a:t>random</a:t>
+              <a:t> </a:t>
+            </a:r>
+            <a:endParaRPr lang="en-US" sz="2000" dirty="0" smtClean="0">
+              <a:solidFill>
+                <a:schemeClr val="bg1"/>
+              </a:solidFill>
+              <a:latin typeface="Times New Roman" panose="02020603050405020304" pitchFamily="18" charset="0"/>
+              <a:cs typeface="Times New Roman" panose="02020603050405020304" pitchFamily="18" charset="0"/>
+            </a:endParaRPr>
+          </a:p>
+          <a:p>
+            <a:pPr lvl="0" algn="ctr"/>
+            <a:r>
+              <a:rPr lang="en-US" sz="2000" dirty="0" err="1" smtClean="0">
+                <a:solidFill>
+                  <a:schemeClr val="bg1"/>
+                </a:solidFill>
+                <a:latin typeface="Times New Roman" panose="02020603050405020304" pitchFamily="18" charset="0"/>
+                <a:cs typeface="Times New Roman" panose="02020603050405020304" pitchFamily="18" charset="0"/>
+              </a:rPr>
+              <a:t>os</a:t>
             </a:r>
             <a:endParaRPr lang="ru-RU" sz="2000" dirty="0">
               <a:solidFill>
                 <a:schemeClr val="bg1"/>
               </a:solidFill>
+              <a:latin typeface="Times New Roman" panose="02020603050405020304" pitchFamily="18" charset="0"/>
+              <a:cs typeface="Times New Roman" panose="02020603050405020304" pitchFamily="18" charset="0"/>
             </a:endParaRPr>
           </a:p>
           <a:p>
@@ -10583,13 +10633,17 @@
                 <a:solidFill>
                   <a:schemeClr val="bg1"/>
                 </a:solidFill>
+                <a:latin typeface="Times New Roman" panose="02020603050405020304" pitchFamily="18" charset="0"/>
+                <a:cs typeface="Times New Roman" panose="02020603050405020304" pitchFamily="18" charset="0"/>
               </a:rPr>
-              <a:t>pyglet</a:t>
+              <a:t>sys</a:t>
             </a:r>
             <a:endParaRPr lang="ru-RU" sz="2000" dirty="0">
               <a:solidFill>
                 <a:schemeClr val="bg1"/>
               </a:solidFill>
+              <a:latin typeface="Times New Roman" panose="02020603050405020304" pitchFamily="18" charset="0"/>
+              <a:cs typeface="Times New Roman" panose="02020603050405020304" pitchFamily="18" charset="0"/>
             </a:endParaRPr>
           </a:p>
           <a:p>
@@ -10599,13 +10653,17 @@
                 <a:solidFill>
                   <a:schemeClr val="bg1"/>
                 </a:solidFill>
+                <a:latin typeface="Times New Roman" panose="02020603050405020304" pitchFamily="18" charset="0"/>
+                <a:cs typeface="Times New Roman" panose="02020603050405020304" pitchFamily="18" charset="0"/>
               </a:rPr>
-              <a:t>json</a:t>
+              <a:t>shutil</a:t>
             </a:r>
             <a:endParaRPr lang="ru-RU" sz="2000" dirty="0">
               <a:solidFill>
                 <a:schemeClr val="bg1"/>
               </a:solidFill>
+              <a:latin typeface="Times New Roman" panose="02020603050405020304" pitchFamily="18" charset="0"/>
+              <a:cs typeface="Times New Roman" panose="02020603050405020304" pitchFamily="18" charset="0"/>
             </a:endParaRPr>
           </a:p>
           <a:p>
@@ -10615,13 +10673,17 @@
                 <a:solidFill>
                   <a:schemeClr val="bg1"/>
                 </a:solidFill>
+                <a:latin typeface="Times New Roman" panose="02020603050405020304" pitchFamily="18" charset="0"/>
+                <a:cs typeface="Times New Roman" panose="02020603050405020304" pitchFamily="18" charset="0"/>
               </a:rPr>
-              <a:t>os</a:t>
+              <a:t>pathlib</a:t>
             </a:r>
             <a:endParaRPr lang="ru-RU" sz="2000" dirty="0">
               <a:solidFill>
                 <a:schemeClr val="bg1"/>
               </a:solidFill>
+              <a:latin typeface="Times New Roman" panose="02020603050405020304" pitchFamily="18" charset="0"/>
+              <a:cs typeface="Times New Roman" panose="02020603050405020304" pitchFamily="18" charset="0"/>
             </a:endParaRPr>
           </a:p>
           <a:p>
@@ -10631,54 +10693,8 @@
                 <a:solidFill>
                   <a:schemeClr val="bg1"/>
                 </a:solidFill>
-              </a:rPr>
-              <a:t>sys</a:t>
-            </a:r>
-            <a:endParaRPr lang="ru-RU" sz="2000" dirty="0">
-              <a:solidFill>
-                <a:schemeClr val="bg1"/>
-              </a:solidFill>
-            </a:endParaRPr>
-          </a:p>
-          <a:p>
-            <a:pPr lvl="0" algn="ctr"/>
-            <a:r>
-              <a:rPr lang="en-US" sz="2000" dirty="0">
-                <a:solidFill>
-                  <a:schemeClr val="bg1"/>
-                </a:solidFill>
-              </a:rPr>
-              <a:t>shutil</a:t>
-            </a:r>
-            <a:endParaRPr lang="ru-RU" sz="2000" dirty="0">
-              <a:solidFill>
-                <a:schemeClr val="bg1"/>
-              </a:solidFill>
-            </a:endParaRPr>
-          </a:p>
-          <a:p>
-            <a:pPr lvl="0" algn="ctr"/>
-            <a:r>
-              <a:rPr lang="en-US" sz="2000" dirty="0">
-                <a:solidFill>
-                  <a:schemeClr val="bg1"/>
-                </a:solidFill>
-              </a:rPr>
-              <a:t>pathlib</a:t>
-            </a:r>
-            <a:endParaRPr lang="ru-RU" sz="2000" dirty="0">
-              <a:solidFill>
-                <a:schemeClr val="bg1"/>
-              </a:solidFill>
-            </a:endParaRPr>
-          </a:p>
-          <a:p>
-            <a:pPr lvl="0" algn="ctr"/>
-            <a:r>
-              <a:rPr lang="en-US" sz="2000" dirty="0">
-                <a:solidFill>
-                  <a:schemeClr val="bg1"/>
-                </a:solidFill>
+                <a:latin typeface="Times New Roman" panose="02020603050405020304" pitchFamily="18" charset="0"/>
+                <a:cs typeface="Times New Roman" panose="02020603050405020304" pitchFamily="18" charset="0"/>
               </a:rPr>
               <a:t>PyInstaller</a:t>
             </a:r>
@@ -10686,6 +10702,8 @@
               <a:solidFill>
                 <a:schemeClr val="bg1"/>
               </a:solidFill>
+              <a:latin typeface="Times New Roman" panose="02020603050405020304" pitchFamily="18" charset="0"/>
+              <a:cs typeface="Times New Roman" panose="02020603050405020304" pitchFamily="18" charset="0"/>
             </a:endParaRPr>
           </a:p>
         </p:txBody>
@@ -10899,7 +10917,7 @@
         </p:nvSpPr>
         <p:spPr>
           <a:xfrm>
-            <a:off x="2612572" y="469377"/>
+            <a:off x="2667574" y="448752"/>
             <a:ext cx="4008233" cy="561901"/>
           </a:xfrm>
         </p:spPr>
@@ -10914,7 +10932,21 @@
                 <a:latin typeface="Times New Roman" panose="02020603050405020304" pitchFamily="18" charset="0"/>
                 <a:cs typeface="Times New Roman" panose="02020603050405020304" pitchFamily="18" charset="0"/>
               </a:rPr>
-              <a:t>Перспектива развития</a:t>
+              <a:t>Перспектив</a:t>
+            </a:r>
+            <a:r>
+              <a:rPr lang="ru-RU" sz="2800" dirty="0">
+                <a:latin typeface="Times New Roman" panose="02020603050405020304" pitchFamily="18" charset="0"/>
+                <a:cs typeface="Times New Roman" panose="02020603050405020304" pitchFamily="18" charset="0"/>
+              </a:rPr>
+              <a:t>ы</a:t>
+            </a:r>
+            <a:r>
+              <a:rPr lang="ru-RU" sz="2800" dirty="0" smtClean="0">
+                <a:latin typeface="Times New Roman" panose="02020603050405020304" pitchFamily="18" charset="0"/>
+                <a:cs typeface="Times New Roman" panose="02020603050405020304" pitchFamily="18" charset="0"/>
+              </a:rPr>
+              <a:t> развития</a:t>
             </a:r>
             <a:endParaRPr lang="ru-RU" sz="2800" dirty="0">
               <a:latin typeface="Times New Roman" panose="02020603050405020304" pitchFamily="18" charset="0"/>
@@ -10935,8 +10967,8 @@
         </p:nvSpPr>
         <p:spPr>
           <a:xfrm>
-            <a:off x="1276875" y="1780682"/>
-            <a:ext cx="7038900" cy="2096925"/>
+            <a:off x="1841595" y="1794432"/>
+            <a:ext cx="5660189" cy="2096925"/>
           </a:xfrm>
         </p:spPr>
         <p:txBody>
@@ -10968,14 +11000,7 @@
                 <a:latin typeface="Times New Roman" panose="02020603050405020304" pitchFamily="18" charset="0"/>
                 <a:cs typeface="Times New Roman" panose="02020603050405020304" pitchFamily="18" charset="0"/>
               </a:rPr>
-              <a:t>Добавить </a:t>
-            </a:r>
-            <a:r>
-              <a:rPr lang="ru-RU" sz="2400" dirty="0" smtClean="0">
-                <a:latin typeface="Times New Roman" panose="02020603050405020304" pitchFamily="18" charset="0"/>
-                <a:cs typeface="Times New Roman" panose="02020603050405020304" pitchFamily="18" charset="0"/>
-              </a:rPr>
-              <a:t>сюжет</a:t>
+              <a:t>Добавить сюжет</a:t>
             </a:r>
           </a:p>
           <a:p>
@@ -11042,8 +11067,8 @@
         </p:nvSpPr>
         <p:spPr>
           <a:xfrm>
-            <a:off x="3444469" y="214995"/>
-            <a:ext cx="2062557" cy="561901"/>
+            <a:off x="3073209" y="359379"/>
+            <a:ext cx="2681323" cy="685655"/>
           </a:xfrm>
         </p:spPr>
         <p:txBody>
@@ -11053,13 +11078,13 @@
           <a:lstStyle/>
           <a:p>
             <a:r>
-              <a:rPr lang="ru-RU" sz="2800" dirty="0" smtClean="0">
+              <a:rPr lang="ru-RU" sz="3600" dirty="0" smtClean="0">
                 <a:latin typeface="Times New Roman" panose="02020603050405020304" pitchFamily="18" charset="0"/>
                 <a:cs typeface="Times New Roman" panose="02020603050405020304" pitchFamily="18" charset="0"/>
               </a:rPr>
               <a:t>Заключение</a:t>
             </a:r>
-            <a:endParaRPr lang="ru-RU" sz="2800" dirty="0">
+            <a:endParaRPr lang="ru-RU" sz="3600" dirty="0">
               <a:latin typeface="Times New Roman" panose="02020603050405020304" pitchFamily="18" charset="0"/>
               <a:cs typeface="Times New Roman" panose="02020603050405020304" pitchFamily="18" charset="0"/>
             </a:endParaRPr>
@@ -11111,6 +11136,9 @@
             </a:endParaRPr>
           </a:p>
           <a:p>
+            <a:pPr marL="146050" indent="0">
+              <a:buNone/>
+            </a:pPr>
             <a:r>
               <a:rPr lang="ru-RU" sz="2400" dirty="0" smtClean="0">
                 <a:latin typeface="Times New Roman" panose="02020603050405020304" pitchFamily="18" charset="0"/>
@@ -11208,21 +11236,28 @@
                 <a:latin typeface="Times New Roman" panose="02020603050405020304" pitchFamily="18" charset="0"/>
                 <a:cs typeface="Times New Roman" panose="02020603050405020304" pitchFamily="18" charset="0"/>
               </a:rPr>
-              <a:t>Создан </a:t>
+              <a:t>Создан</a:t>
             </a:r>
             <a:r>
               <a:rPr lang="en-US" sz="2200" dirty="0" smtClean="0">
                 <a:latin typeface="Times New Roman" panose="02020603050405020304" pitchFamily="18" charset="0"/>
                 <a:cs typeface="Times New Roman" panose="02020603050405020304" pitchFamily="18" charset="0"/>
               </a:rPr>
-              <a:t>UI-</a:t>
+              <a:t> </a:t>
             </a:r>
             <a:r>
               <a:rPr lang="ru-RU" sz="2200" dirty="0" smtClean="0">
                 <a:latin typeface="Times New Roman" panose="02020603050405020304" pitchFamily="18" charset="0"/>
                 <a:cs typeface="Times New Roman" panose="02020603050405020304" pitchFamily="18" charset="0"/>
               </a:rPr>
-              <a:t>интерфейс</a:t>
+              <a:t>пользовательский интерфейс (</a:t>
+            </a:r>
+            <a:r>
+              <a:rPr lang="en-US" sz="2200" dirty="0" smtClean="0">
+                <a:latin typeface="Times New Roman" panose="02020603050405020304" pitchFamily="18" charset="0"/>
+                <a:cs typeface="Times New Roman" panose="02020603050405020304" pitchFamily="18" charset="0"/>
+              </a:rPr>
+              <a:t>UI)</a:t>
             </a:r>
             <a:endParaRPr lang="ru-RU" sz="2200" dirty="0" smtClean="0">
               <a:latin typeface="Times New Roman" panose="02020603050405020304" pitchFamily="18" charset="0"/>
@@ -11312,8 +11347,8 @@
         </p:nvSpPr>
         <p:spPr>
           <a:xfrm>
-            <a:off x="2392565" y="206256"/>
-            <a:ext cx="4014240" cy="523220"/>
+            <a:off x="2118451" y="233756"/>
+            <a:ext cx="4562467" cy="584775"/>
           </a:xfrm>
           <a:prstGeom prst="rect">
             <a:avLst/>
@@ -11327,7 +11362,7 @@
           <a:lstStyle/>
           <a:p>
             <a:r>
-              <a:rPr lang="ru-RU" sz="2800" dirty="0" smtClean="0">
+              <a:rPr lang="ru-RU" sz="3200" dirty="0" smtClean="0">
                 <a:solidFill>
                   <a:schemeClr val="bg1"/>
                 </a:solidFill>
@@ -11336,7 +11371,7 @@
               </a:rPr>
               <a:t>Ссылка на исходный код</a:t>
             </a:r>
-            <a:endParaRPr lang="ru-RU" sz="2800" dirty="0">
+            <a:endParaRPr lang="ru-RU" sz="3200" dirty="0">
               <a:solidFill>
                 <a:schemeClr val="bg1"/>
               </a:solidFill>
@@ -11368,7 +11403,7 @@
         </p:blipFill>
         <p:spPr>
           <a:xfrm>
-            <a:off x="2564010" y="893775"/>
+            <a:off x="2564009" y="1058779"/>
             <a:ext cx="3671350" cy="3671350"/>
           </a:xfrm>
           <a:prstGeom prst="rect">
